--- a/backend/services/main.pptx
+++ b/backend/services/main.pptx
@@ -791,7 +791,7 @@
         </p:nvSpPr>
         <p:spPr>
           <a:xfrm>
-            <a:off x="1198800" y="2484000"/>
+            <a:off x="820340" y="566935"/>
             <a:ext cx="9799200" cy="1018800"/>
           </a:xfrm>
         </p:spPr>
@@ -800,8 +800,25 @@
             <a:normAutofit/>
           </a:bodyPr>
           <a:lstStyle>
-            <a:lvl1pPr algn="ctr">
-              <a:defRPr sz="6000"/>
+            <a:lvl1pPr algn="l">
+              <a:defRPr sz="6000">
+                <a:ln w="10160">
+                  <a:solidFill>
+                    <a:schemeClr val="accent5"/>
+                  </a:solidFill>
+                  <a:prstDash val="solid"/>
+                </a:ln>
+                <a:solidFill>
+                  <a:srgbClr val="FFFFFF"/>
+                </a:solidFill>
+                <a:effectLst>
+                  <a:outerShdw blurRad="38100" dist="22860" dir="5400000" algn="tl" rotWithShape="0">
+                    <a:srgbClr val="000000">
+                      <a:alpha val="30000"/>
+                    </a:srgbClr>
+                  </a:outerShdw>
+                </a:effectLst>
+              </a:defRPr>
             </a:lvl1pPr>
           </a:lstStyle>
           <a:p>
@@ -829,8 +846,8 @@
         </p:nvSpPr>
         <p:spPr>
           <a:xfrm>
-            <a:off x="1198800" y="3560400"/>
-            <a:ext cx="9799200" cy="471600"/>
+            <a:off x="820420" y="2168525"/>
+            <a:ext cx="9688830" cy="3627755"/>
           </a:xfrm>
         </p:spPr>
         <p:txBody>
@@ -838,12 +855,24 @@
             <a:normAutofit/>
           </a:bodyPr>
           <a:lstStyle>
-            <a:lvl1pPr algn="ctr">
+            <a:lvl1pPr algn="l">
               <a:lnSpc>
                 <a:spcPct val="110000"/>
               </a:lnSpc>
               <a:buNone/>
-              <a:defRPr sz="2400" spc="200"/>
+              <a:defRPr sz="2800" spc="200">
+                <a:ln/>
+                <a:solidFill>
+                  <a:schemeClr val="tx1"/>
+                </a:solidFill>
+                <a:effectLst>
+                  <a:outerShdw blurRad="38100" dist="19050" dir="2700000" algn="tl" rotWithShape="0">
+                    <a:schemeClr val="dk1">
+                      <a:alpha val="40000"/>
+                    </a:schemeClr>
+                  </a:outerShdw>
+                </a:effectLst>
+              </a:defRPr>
             </a:lvl1pPr>
           </a:lstStyle>
           <a:p>

--- a/backend/services/main.pptx
+++ b/backend/services/main.pptx
@@ -104,12 +104,12 @@
   <p:extLst>
     <p:ext uri="{EFAFB233-063F-42B5-8137-9DF3F51BA10A}">
       <p15:sldGuideLst xmlns:p15="http://schemas.microsoft.com/office/powerpoint/2012/main">
-        <p15:guide id="1" orient="horz" pos="2160" userDrawn="1">
+        <p15:guide id="1" orient="horz" pos="2216" userDrawn="1">
           <p15:clr>
             <a:srgbClr val="A4A3A4"/>
           </p15:clr>
         </p15:guide>
-        <p15:guide id="2" pos="3873" userDrawn="1">
+        <p15:guide id="2" pos="3837" userDrawn="1">
           <p15:clr>
             <a:srgbClr val="A4A3A4"/>
           </p15:clr>
@@ -150,6 +150,96 @@
       </p:grpSpPr>
       <p:sp>
         <p:nvSpPr>
+          <p:cNvPr id="11" name="AutoShape 8"/>
+          <p:cNvSpPr/>
+          <p:nvPr userDrawn="1">
+            <p:custDataLst>
+              <p:tags r:id="rId3"/>
+            </p:custDataLst>
+          </p:nvPr>
+        </p:nvSpPr>
+        <p:spPr>
+          <a:xfrm>
+            <a:off x="6316345" y="1731645"/>
+            <a:ext cx="5334000" cy="4418965"/>
+          </a:xfrm>
+          <a:prstGeom prst="roundRect">
+            <a:avLst>
+              <a:gd name="adj" fmla="val 3333"/>
+            </a:avLst>
+          </a:prstGeom>
+          <a:solidFill>
+            <a:srgbClr val="FFFFFF">
+              <a:alpha val="95000"/>
+            </a:srgbClr>
+          </a:solidFill>
+          <a:ln w="12700" cap="flat" cmpd="sng">
+            <a:noFill/>
+            <a:prstDash val="sysDot"/>
+            <a:round/>
+          </a:ln>
+          <a:effectLst/>
+        </p:spPr>
+        <p:txBody>
+          <a:bodyPr vert="horz" wrap="square" lIns="63500" tIns="63500" rIns="63500" bIns="63500" rtlCol="0" anchor="ctr"/>
+          <a:lstStyle/>
+          <a:p>
+            <a:pPr algn="ctr">
+              <a:defRPr/>
+            </a:pPr>
+          </a:p>
+        </p:txBody>
+      </p:sp>
+      <p:sp>
+        <p:nvSpPr>
+          <p:cNvPr id="10" name="AutoShape 8"/>
+          <p:cNvSpPr/>
+          <p:nvPr userDrawn="1">
+            <p:custDataLst>
+              <p:tags r:id="rId4"/>
+            </p:custDataLst>
+          </p:nvPr>
+        </p:nvSpPr>
+        <p:spPr>
+          <a:xfrm>
+            <a:off x="608330" y="1731645"/>
+            <a:ext cx="5334000" cy="4418965"/>
+          </a:xfrm>
+          <a:prstGeom prst="roundRect">
+            <a:avLst>
+              <a:gd name="adj" fmla="val 3333"/>
+            </a:avLst>
+          </a:prstGeom>
+          <a:solidFill>
+            <a:srgbClr val="FFFFFF">
+              <a:alpha val="95000"/>
+            </a:srgbClr>
+          </a:solidFill>
+          <a:ln w="25400" cap="flat" cmpd="sng">
+            <a:noFill/>
+            <a:prstDash val="solid"/>
+            <a:round/>
+          </a:ln>
+          <a:effectLst>
+            <a:outerShdw blurRad="127000" dist="50800" dir="5400000" algn="tl" rotWithShape="0">
+              <a:srgbClr val="2E5EAA">
+                <a:alpha val="10000"/>
+              </a:srgbClr>
+            </a:outerShdw>
+          </a:effectLst>
+        </p:spPr>
+        <p:txBody>
+          <a:bodyPr vert="horz" wrap="square" lIns="63500" tIns="63500" rIns="63500" bIns="63500" rtlCol="0" anchor="ctr"/>
+          <a:lstStyle/>
+          <a:p>
+            <a:pPr algn="ctr">
+              <a:defRPr/>
+            </a:pPr>
+          </a:p>
+        </p:txBody>
+      </p:sp>
+      <p:sp>
+        <p:nvSpPr>
           <p:cNvPr id="2" name="标题 1"/>
           <p:cNvSpPr>
             <a:spLocks noGrp="1"/>
@@ -157,7 +247,7 @@
           <p:nvPr>
             <p:ph type="title"/>
             <p:custDataLst>
-              <p:tags r:id="rId3"/>
+              <p:tags r:id="rId5"/>
             </p:custDataLst>
           </p:nvPr>
         </p:nvSpPr>
@@ -199,14 +289,14 @@
           <p:nvPr>
             <p:ph type="body" idx="1" hasCustomPrompt="1"/>
             <p:custDataLst>
-              <p:tags r:id="rId4"/>
+              <p:tags r:id="rId6"/>
             </p:custDataLst>
           </p:nvPr>
         </p:nvSpPr>
         <p:spPr>
           <a:xfrm>
-            <a:off x="608400" y="1429200"/>
-            <a:ext cx="5342400" cy="381600"/>
+            <a:off x="695960" y="1926590"/>
+            <a:ext cx="5107940" cy="673100"/>
           </a:xfrm>
         </p:spPr>
         <p:txBody>
@@ -221,10 +311,7 @@
               <a:buNone/>
               <a:defRPr sz="2400" b="1" spc="200">
                 <a:solidFill>
-                  <a:schemeClr val="tx1">
-                    <a:lumMod val="75000"/>
-                    <a:lumOff val="25000"/>
-                  </a:schemeClr>
+                  <a:schemeClr val="accent1"/>
                 </a:solidFill>
               </a:defRPr>
             </a:lvl1pPr>
@@ -280,14 +367,14 @@
           <p:nvPr>
             <p:ph sz="half" idx="2"/>
             <p:custDataLst>
-              <p:tags r:id="rId5"/>
+              <p:tags r:id="rId7"/>
             </p:custDataLst>
           </p:nvPr>
         </p:nvSpPr>
         <p:spPr>
           <a:xfrm>
-            <a:off x="608400" y="1854000"/>
-            <a:ext cx="5342400" cy="4395600"/>
+            <a:off x="695960" y="3072765"/>
+            <a:ext cx="5107940" cy="3023870"/>
           </a:xfrm>
         </p:spPr>
         <p:txBody>
@@ -297,7 +384,14 @@
           <a:lstStyle>
             <a:lvl1pPr marL="0" indent="0">
               <a:buNone/>
-              <a:defRPr sz="2000"/>
+              <a:defRPr sz="2000">
+                <a:solidFill>
+                  <a:schemeClr val="accent1">
+                    <a:lumMod val="40000"/>
+                    <a:lumOff val="60000"/>
+                  </a:schemeClr>
+                </a:solidFill>
+              </a:defRPr>
             </a:lvl1pPr>
             <a:lvl2pPr marL="457200" indent="0">
               <a:buNone/>
@@ -327,14 +421,14 @@
           <p:nvPr>
             <p:ph type="body" sz="quarter" idx="3" hasCustomPrompt="1"/>
             <p:custDataLst>
-              <p:tags r:id="rId6"/>
+              <p:tags r:id="rId8"/>
             </p:custDataLst>
           </p:nvPr>
         </p:nvSpPr>
         <p:spPr>
           <a:xfrm>
-            <a:off x="6235750" y="1421729"/>
-            <a:ext cx="5342400" cy="381600"/>
+            <a:off x="6410325" y="1947545"/>
+            <a:ext cx="5022215" cy="652145"/>
           </a:xfrm>
         </p:spPr>
         <p:txBody>
@@ -349,10 +443,7 @@
               <a:buNone/>
               <a:defRPr sz="2400" b="1" spc="200">
                 <a:solidFill>
-                  <a:schemeClr val="tx1">
-                    <a:lumMod val="75000"/>
-                    <a:lumOff val="25000"/>
-                  </a:schemeClr>
+                  <a:schemeClr val="accent2"/>
                 </a:solidFill>
               </a:defRPr>
             </a:lvl1pPr>
@@ -408,14 +499,14 @@
           <p:nvPr>
             <p:ph sz="quarter" idx="4"/>
             <p:custDataLst>
-              <p:tags r:id="rId7"/>
+              <p:tags r:id="rId9"/>
             </p:custDataLst>
           </p:nvPr>
         </p:nvSpPr>
         <p:spPr>
           <a:xfrm>
-            <a:off x="6235750" y="1854000"/>
-            <a:ext cx="5342400" cy="4395600"/>
+            <a:off x="6454140" y="3073400"/>
+            <a:ext cx="5123815" cy="3029585"/>
           </a:xfrm>
         </p:spPr>
         <p:txBody>
@@ -425,7 +516,14 @@
           <a:lstStyle>
             <a:lvl1pPr marL="0" indent="0">
               <a:buNone/>
-              <a:defRPr sz="2000"/>
+              <a:defRPr sz="2000">
+                <a:solidFill>
+                  <a:schemeClr val="accent2">
+                    <a:lumMod val="40000"/>
+                    <a:lumOff val="60000"/>
+                  </a:schemeClr>
+                </a:solidFill>
+              </a:defRPr>
             </a:lvl1pPr>
             <a:lvl2pPr marL="457200" indent="0">
               <a:buNone/>
@@ -455,7 +553,7 @@
           <p:nvPr>
             <p:ph type="dt" sz="half" idx="10"/>
             <p:custDataLst>
-              <p:tags r:id="rId8"/>
+              <p:tags r:id="rId10"/>
             </p:custDataLst>
           </p:nvPr>
         </p:nvSpPr>
@@ -480,7 +578,7 @@
           <p:nvPr>
             <p:ph type="ftr" sz="quarter" idx="11"/>
             <p:custDataLst>
-              <p:tags r:id="rId9"/>
+              <p:tags r:id="rId11"/>
             </p:custDataLst>
           </p:nvPr>
         </p:nvSpPr>
@@ -502,7 +600,7 @@
           <p:nvPr>
             <p:ph type="sldNum" sz="quarter" idx="12"/>
             <p:custDataLst>
-              <p:tags r:id="rId10"/>
+              <p:tags r:id="rId12"/>
             </p:custDataLst>
           </p:nvPr>
         </p:nvSpPr>
@@ -518,6 +616,125 @@
           </a:p>
         </p:txBody>
       </p:sp>
+      <p:sp>
+        <p:nvSpPr>
+          <p:cNvPr id="12" name="AutoShape 5"/>
+          <p:cNvSpPr/>
+          <p:nvPr userDrawn="1">
+            <p:custDataLst>
+              <p:tags r:id="rId13"/>
+            </p:custDataLst>
+          </p:nvPr>
+        </p:nvSpPr>
+        <p:spPr>
+          <a:xfrm>
+            <a:off x="612140" y="1731645"/>
+            <a:ext cx="5334000" cy="76200"/>
+          </a:xfrm>
+          <a:prstGeom prst="roundRect">
+            <a:avLst>
+              <a:gd name="adj" fmla="val 166666"/>
+            </a:avLst>
+          </a:prstGeom>
+          <a:solidFill>
+            <a:srgbClr val="2E5EAA">
+              <a:alpha val="100000"/>
+            </a:srgbClr>
+          </a:solidFill>
+          <a:ln w="25400" cap="flat" cmpd="sng">
+            <a:noFill/>
+            <a:prstDash val="solid"/>
+            <a:round/>
+          </a:ln>
+        </p:spPr>
+        <p:txBody>
+          <a:bodyPr vert="horz" wrap="square" lIns="63500" tIns="63500" rIns="63500" bIns="63500" rtlCol="0" anchor="ctr"/>
+          <a:lstStyle/>
+          <a:p>
+            <a:pPr algn="ctr">
+              <a:defRPr/>
+            </a:pPr>
+          </a:p>
+        </p:txBody>
+      </p:sp>
+      <p:sp>
+        <p:nvSpPr>
+          <p:cNvPr id="13" name="AutoShape 9"/>
+          <p:cNvSpPr/>
+          <p:nvPr userDrawn="1">
+            <p:custDataLst>
+              <p:tags r:id="rId14"/>
+            </p:custDataLst>
+          </p:nvPr>
+        </p:nvSpPr>
+        <p:spPr>
+          <a:xfrm>
+            <a:off x="6349365" y="1731645"/>
+            <a:ext cx="5301615" cy="76200"/>
+          </a:xfrm>
+          <a:prstGeom prst="roundRect">
+            <a:avLst>
+              <a:gd name="adj" fmla="val 166666"/>
+            </a:avLst>
+          </a:prstGeom>
+          <a:solidFill>
+            <a:srgbClr val="FF7D00">
+              <a:alpha val="100000"/>
+            </a:srgbClr>
+          </a:solidFill>
+          <a:ln w="25400" cap="flat" cmpd="sng">
+            <a:noFill/>
+            <a:prstDash val="solid"/>
+            <a:round/>
+          </a:ln>
+        </p:spPr>
+        <p:txBody>
+          <a:bodyPr vert="horz" wrap="square" lIns="63500" tIns="63500" rIns="63500" bIns="63500" rtlCol="0" anchor="ctr"/>
+          <a:lstStyle/>
+          <a:p>
+            <a:pPr algn="ctr">
+              <a:defRPr/>
+            </a:pPr>
+          </a:p>
+        </p:txBody>
+      </p:sp>
+      <p:cxnSp>
+        <p:nvCxnSpPr>
+          <p:cNvPr id="15" name="直接连接符 14"/>
+          <p:cNvCxnSpPr/>
+          <p:nvPr/>
+        </p:nvCxnSpPr>
+        <p:spPr>
+          <a:xfrm>
+            <a:off x="6123940" y="1731645"/>
+            <a:ext cx="15240" cy="4334510"/>
+          </a:xfrm>
+          <a:prstGeom prst="line">
+            <a:avLst/>
+          </a:prstGeom>
+          <a:ln>
+            <a:solidFill>
+              <a:schemeClr val="bg1">
+                <a:lumMod val="50000"/>
+              </a:schemeClr>
+            </a:solidFill>
+          </a:ln>
+        </p:spPr>
+        <p:style>
+          <a:lnRef idx="2">
+            <a:schemeClr val="accent1"/>
+          </a:lnRef>
+          <a:fillRef idx="0">
+            <a:srgbClr val="FFFFFF"/>
+          </a:fillRef>
+          <a:effectRef idx="0">
+            <a:srgbClr val="FFFFFF"/>
+          </a:effectRef>
+          <a:fontRef idx="minor">
+            <a:schemeClr val="tx1"/>
+          </a:fontRef>
+        </p:style>
+      </p:cxnSp>
     </p:spTree>
   </p:cSld>
   <p:clrMapOvr>
@@ -658,6 +875,11 @@
         </p:spPr>
         <p:txBody>
           <a:bodyPr/>
+          <a:lstStyle>
+            <a:lvl1pPr>
+              <a:defRPr sz="2400"/>
+            </a:lvl1pPr>
+          </a:lstStyle>
           <a:p>
             <a:pPr lvl="0"/>
             <a:r>
@@ -802,19 +1024,13 @@
           <a:lstStyle>
             <a:lvl1pPr algn="l">
               <a:defRPr sz="6000">
-                <a:ln w="10160">
-                  <a:solidFill>
-                    <a:schemeClr val="accent5"/>
-                  </a:solidFill>
-                  <a:prstDash val="solid"/>
-                </a:ln>
                 <a:solidFill>
-                  <a:srgbClr val="FFFFFF"/>
+                  <a:schemeClr val="accent1"/>
                 </a:solidFill>
                 <a:effectLst>
-                  <a:outerShdw blurRad="38100" dist="22860" dir="5400000" algn="tl" rotWithShape="0">
-                    <a:srgbClr val="000000">
-                      <a:alpha val="30000"/>
+                  <a:outerShdw blurRad="38100" dist="25400" dir="5400000" algn="ctr" rotWithShape="0">
+                    <a:srgbClr val="6E747A">
+                      <a:alpha val="43000"/>
                     </a:srgbClr>
                   </a:outerShdw>
                 </a:effectLst>
@@ -861,7 +1077,6 @@
               </a:lnSpc>
               <a:buNone/>
               <a:defRPr sz="2800" spc="200">
-                <a:ln/>
                 <a:solidFill>
                   <a:schemeClr val="tx1"/>
                 </a:solidFill>
@@ -942,22 +1157,25 @@
           <a:lstStyle>
             <a:lvl1pPr algn="ctr">
               <a:defRPr>
-                <a:ln w="10160">
-                  <a:solidFill>
-                    <a:schemeClr val="accent5"/>
-                  </a:solidFill>
-                  <a:prstDash val="solid"/>
-                </a:ln>
-                <a:solidFill>
-                  <a:srgbClr val="FFFFFF"/>
-                </a:solidFill>
-                <a:effectLst>
-                  <a:outerShdw blurRad="38100" dist="22860" dir="5400000" algn="tl" rotWithShape="0">
-                    <a:srgbClr val="000000">
-                      <a:alpha val="30000"/>
-                    </a:srgbClr>
-                  </a:outerShdw>
-                </a:effectLst>
+                <a:ln w="15875"/>
+                <a:gradFill>
+                  <a:gsLst>
+                    <a:gs pos="0">
+                      <a:schemeClr val="accent1">
+                        <a:lumOff val="-19993"/>
+                        <a:satOff val="20000"/>
+                      </a:schemeClr>
+                    </a:gs>
+                    <a:gs pos="100000">
+                      <a:schemeClr val="accent1">
+                        <a:lumOff val="15000"/>
+                        <a:satOff val="-14993"/>
+                      </a:schemeClr>
+                    </a:gs>
+                  </a:gsLst>
+                  <a:lin ang="0" scaled="0"/>
+                </a:gradFill>
+                <a:effectLst/>
               </a:defRPr>
             </a:lvl1pPr>
           </a:lstStyle>
@@ -1339,7 +1557,22 @@
         <p:spPr/>
         <p:txBody>
           <a:bodyPr/>
-          <a:lstStyle/>
+          <a:lstStyle>
+            <a:lvl1pPr>
+              <a:defRPr>
+                <a:solidFill>
+                  <a:schemeClr val="accent1"/>
+                </a:solidFill>
+                <a:effectLst>
+                  <a:outerShdw blurRad="38100" dist="25400" dir="5400000" algn="ctr" rotWithShape="0">
+                    <a:srgbClr val="6E747A">
+                      <a:alpha val="43000"/>
+                    </a:srgbClr>
+                  </a:outerShdw>
+                </a:effectLst>
+              </a:defRPr>
+            </a:lvl1pPr>
+          </a:lstStyle>
           <a:p>
             <a:r>
               <a:rPr lang="zh-CN" altLang="en-US" smtClean="0"/>
@@ -1433,7 +1666,7 @@
           <a:lstStyle>
             <a:lvl1pPr marL="0" indent="0">
               <a:buNone/>
-              <a:defRPr/>
+              <a:defRPr sz="2400"/>
             </a:lvl1pPr>
             <a:lvl2pPr marL="457200" indent="0">
               <a:buNone/>
@@ -1572,7 +1805,22 @@
         <p:spPr/>
         <p:txBody>
           <a:bodyPr/>
-          <a:lstStyle/>
+          <a:lstStyle>
+            <a:lvl1pPr>
+              <a:defRPr>
+                <a:solidFill>
+                  <a:schemeClr val="accent1"/>
+                </a:solidFill>
+                <a:effectLst>
+                  <a:outerShdw blurRad="38100" dist="25400" dir="5400000" algn="ctr" rotWithShape="0">
+                    <a:srgbClr val="6E747A">
+                      <a:alpha val="43000"/>
+                    </a:srgbClr>
+                  </a:outerShdw>
+                </a:effectLst>
+              </a:defRPr>
+            </a:lvl1pPr>
+          </a:lstStyle>
           <a:p>
             <a:r>
               <a:rPr lang="zh-CN" altLang="en-US" smtClean="0"/>
@@ -1666,7 +1914,7 @@
           <a:lstStyle>
             <a:lvl1pPr marL="0" indent="0">
               <a:buNone/>
-              <a:defRPr/>
+              <a:defRPr sz="2400"/>
             </a:lvl1pPr>
             <a:lvl2pPr marL="457200" indent="0">
               <a:buNone/>
@@ -1786,129 +2034,26 @@
       </p:grpSpPr>
       <p:sp>
         <p:nvSpPr>
-          <p:cNvPr id="2" name="标题 1"/>
-          <p:cNvSpPr>
-            <a:spLocks noGrp="1"/>
-          </p:cNvSpPr>
-          <p:nvPr>
-            <p:ph type="title"/>
-          </p:nvPr>
-        </p:nvSpPr>
-        <p:spPr/>
-        <p:txBody>
-          <a:bodyPr>
-            <a:scene3d>
-              <a:camera prst="orthographicFront"/>
-              <a:lightRig rig="threePt" dir="t"/>
-            </a:scene3d>
-          </a:bodyPr>
-          <a:lstStyle>
-            <a:lvl1pPr>
-              <a:defRPr>
-                <a:solidFill>
-                  <a:schemeClr val="accent1"/>
-                </a:solidFill>
-                <a:effectLst>
-                  <a:outerShdw blurRad="38100" dist="25400" dir="5400000" algn="ctr" rotWithShape="0">
-                    <a:srgbClr val="6E747A">
-                      <a:alpha val="43000"/>
-                    </a:srgbClr>
-                  </a:outerShdw>
-                </a:effectLst>
-              </a:defRPr>
-            </a:lvl1pPr>
-          </a:lstStyle>
-          <a:p>
-            <a:r>
-              <a:rPr lang="zh-CN" altLang="en-US" smtClean="0"/>
-              <a:t>单击此处编辑母版标题样式</a:t>
-            </a:r>
-            <a:endParaRPr lang="zh-CN" altLang="en-US"/>
-          </a:p>
-        </p:txBody>
-      </p:sp>
-      <p:sp>
-        <p:nvSpPr>
-          <p:cNvPr id="3" name="日期占位符 2"/>
-          <p:cNvSpPr>
-            <a:spLocks noGrp="1"/>
-          </p:cNvSpPr>
-          <p:nvPr>
-            <p:ph type="dt" sz="half" idx="10"/>
-          </p:nvPr>
-        </p:nvSpPr>
-        <p:spPr/>
-        <p:txBody>
-          <a:bodyPr/>
-          <a:lstStyle/>
-          <a:p>
-            <a:fld id="{760FBDFE-C587-4B4C-A407-44438C67B59E}" type="datetimeFigureOut">
-              <a:rPr lang="zh-CN" altLang="en-US" smtClean="0"/>
-            </a:fld>
-            <a:endParaRPr lang="zh-CN" altLang="en-US"/>
-          </a:p>
-        </p:txBody>
-      </p:sp>
-      <p:sp>
-        <p:nvSpPr>
-          <p:cNvPr id="4" name="页脚占位符 3"/>
-          <p:cNvSpPr>
-            <a:spLocks noGrp="1"/>
-          </p:cNvSpPr>
-          <p:nvPr>
-            <p:ph type="ftr" sz="quarter" idx="11"/>
-          </p:nvPr>
-        </p:nvSpPr>
-        <p:spPr/>
-        <p:txBody>
-          <a:bodyPr/>
-          <a:lstStyle/>
-          <a:p>
-            <a:endParaRPr lang="zh-CN" altLang="en-US" dirty="0"/>
-          </a:p>
-        </p:txBody>
-      </p:sp>
-      <p:sp>
-        <p:nvSpPr>
-          <p:cNvPr id="5" name="灯片编号占位符 4"/>
-          <p:cNvSpPr>
-            <a:spLocks noGrp="1"/>
-          </p:cNvSpPr>
-          <p:nvPr>
-            <p:ph type="sldNum" sz="quarter" idx="12"/>
-          </p:nvPr>
-        </p:nvSpPr>
-        <p:spPr/>
-        <p:txBody>
-          <a:bodyPr/>
-          <a:lstStyle/>
-          <a:p>
-            <a:fld id="{49AE70B2-8BF9-45C0-BB95-33D1B9D3A854}" type="slidenum">
-              <a:rPr lang="zh-CN" altLang="en-US" smtClean="0"/>
-            </a:fld>
-            <a:endParaRPr lang="zh-CN" altLang="en-US" dirty="0"/>
-          </a:p>
-        </p:txBody>
-      </p:sp>
-      <p:sp>
-        <p:nvSpPr>
-          <p:cNvPr id="6" name="矩形 5"/>
+          <p:cNvPr id="17" name="圆角矩形 16"/>
           <p:cNvSpPr/>
           <p:nvPr userDrawn="1"/>
         </p:nvSpPr>
         <p:spPr>
           <a:xfrm>
-            <a:off x="612140" y="2176780"/>
-            <a:ext cx="2700020" cy="3195955"/>
-          </a:xfrm>
-          <a:prstGeom prst="rect">
+            <a:off x="8495030" y="2087880"/>
+            <a:ext cx="2765425" cy="3296920"/>
+          </a:xfrm>
+          <a:prstGeom prst="roundRect">
             <a:avLst/>
           </a:prstGeom>
           <a:solidFill>
-            <a:schemeClr val="bg1">
-              <a:alpha val="80000"/>
-            </a:schemeClr>
+            <a:srgbClr val="E0F0FC">
+              <a:alpha val="87000"/>
+            </a:srgbClr>
           </a:solidFill>
+          <a:ln>
+            <a:noFill/>
+          </a:ln>
         </p:spPr>
         <p:style>
           <a:lnRef idx="2">
@@ -1936,23 +2081,26 @@
       </p:sp>
       <p:sp>
         <p:nvSpPr>
-          <p:cNvPr id="7" name="矩形 6"/>
+          <p:cNvPr id="8" name="圆角矩形 7"/>
           <p:cNvSpPr/>
           <p:nvPr userDrawn="1"/>
         </p:nvSpPr>
         <p:spPr>
           <a:xfrm>
-            <a:off x="4443095" y="2176780"/>
-            <a:ext cx="2809240" cy="3246755"/>
-          </a:xfrm>
-          <a:prstGeom prst="rect">
+            <a:off x="8495030" y="3101340"/>
+            <a:ext cx="2765425" cy="2283460"/>
+          </a:xfrm>
+          <a:prstGeom prst="roundRect">
             <a:avLst/>
           </a:prstGeom>
           <a:solidFill>
-            <a:schemeClr val="bg1">
-              <a:alpha val="80000"/>
-            </a:schemeClr>
+            <a:schemeClr val="bg1"/>
           </a:solidFill>
+          <a:ln>
+            <a:solidFill>
+              <a:srgbClr val="D0E8F7"/>
+            </a:solidFill>
+          </a:ln>
         </p:spPr>
         <p:style>
           <a:lnRef idx="2">
@@ -1980,23 +2128,26 @@
       </p:sp>
       <p:sp>
         <p:nvSpPr>
-          <p:cNvPr id="8" name="矩形 7"/>
+          <p:cNvPr id="16" name="圆角矩形 15"/>
           <p:cNvSpPr/>
           <p:nvPr userDrawn="1"/>
         </p:nvSpPr>
         <p:spPr>
           <a:xfrm>
-            <a:off x="8382635" y="2176780"/>
-            <a:ext cx="2940685" cy="3246120"/>
-          </a:xfrm>
-          <a:prstGeom prst="rect">
+            <a:off x="4455160" y="2087880"/>
+            <a:ext cx="2765425" cy="3296920"/>
+          </a:xfrm>
+          <a:prstGeom prst="roundRect">
             <a:avLst/>
           </a:prstGeom>
           <a:solidFill>
-            <a:schemeClr val="bg1">
-              <a:alpha val="80000"/>
-            </a:schemeClr>
+            <a:srgbClr val="E0F0FC">
+              <a:alpha val="87000"/>
+            </a:srgbClr>
           </a:solidFill>
+          <a:ln>
+            <a:noFill/>
+          </a:ln>
         </p:spPr>
         <p:style>
           <a:lnRef idx="2">
@@ -2024,6 +2175,253 @@
       </p:sp>
       <p:sp>
         <p:nvSpPr>
+          <p:cNvPr id="7" name="圆角矩形 6"/>
+          <p:cNvSpPr/>
+          <p:nvPr userDrawn="1"/>
+        </p:nvSpPr>
+        <p:spPr>
+          <a:xfrm>
+            <a:off x="4455160" y="3089275"/>
+            <a:ext cx="2765425" cy="2296160"/>
+          </a:xfrm>
+          <a:prstGeom prst="roundRect">
+            <a:avLst/>
+          </a:prstGeom>
+          <a:solidFill>
+            <a:schemeClr val="bg1"/>
+          </a:solidFill>
+          <a:ln>
+            <a:solidFill>
+              <a:srgbClr val="D0E8F7"/>
+            </a:solidFill>
+          </a:ln>
+        </p:spPr>
+        <p:style>
+          <a:lnRef idx="2">
+            <a:schemeClr val="accent1">
+              <a:lumMod val="75000"/>
+            </a:schemeClr>
+          </a:lnRef>
+          <a:fillRef idx="1">
+            <a:schemeClr val="accent1"/>
+          </a:fillRef>
+          <a:effectRef idx="0">
+            <a:srgbClr val="FFFFFF"/>
+          </a:effectRef>
+          <a:fontRef idx="minor">
+            <a:schemeClr val="lt1"/>
+          </a:fontRef>
+        </p:style>
+        <p:txBody>
+          <a:bodyPr rtlCol="0" anchor="ctr"/>
+          <a:p>
+            <a:pPr algn="ctr"/>
+            <a:endParaRPr lang="zh-CN" altLang="en-US"/>
+          </a:p>
+        </p:txBody>
+      </p:sp>
+      <p:sp>
+        <p:nvSpPr>
+          <p:cNvPr id="15" name="圆角矩形 14"/>
+          <p:cNvSpPr/>
+          <p:nvPr userDrawn="1"/>
+        </p:nvSpPr>
+        <p:spPr>
+          <a:xfrm>
+            <a:off x="612140" y="2087880"/>
+            <a:ext cx="2765425" cy="3296920"/>
+          </a:xfrm>
+          <a:prstGeom prst="roundRect">
+            <a:avLst/>
+          </a:prstGeom>
+          <a:solidFill>
+            <a:srgbClr val="E0F0FC">
+              <a:alpha val="87000"/>
+            </a:srgbClr>
+          </a:solidFill>
+          <a:ln>
+            <a:noFill/>
+          </a:ln>
+        </p:spPr>
+        <p:style>
+          <a:lnRef idx="2">
+            <a:schemeClr val="accent1">
+              <a:lumMod val="75000"/>
+            </a:schemeClr>
+          </a:lnRef>
+          <a:fillRef idx="1">
+            <a:schemeClr val="accent1"/>
+          </a:fillRef>
+          <a:effectRef idx="0">
+            <a:srgbClr val="FFFFFF"/>
+          </a:effectRef>
+          <a:fontRef idx="minor">
+            <a:schemeClr val="lt1"/>
+          </a:fontRef>
+        </p:style>
+        <p:txBody>
+          <a:bodyPr rtlCol="0" anchor="ctr"/>
+          <a:p>
+            <a:pPr algn="ctr"/>
+            <a:endParaRPr lang="zh-CN" altLang="en-US"/>
+          </a:p>
+        </p:txBody>
+      </p:sp>
+      <p:sp>
+        <p:nvSpPr>
+          <p:cNvPr id="6" name="圆角矩形 5"/>
+          <p:cNvSpPr/>
+          <p:nvPr userDrawn="1"/>
+        </p:nvSpPr>
+        <p:spPr>
+          <a:xfrm>
+            <a:off x="611505" y="3089275"/>
+            <a:ext cx="2765425" cy="2296160"/>
+          </a:xfrm>
+          <a:prstGeom prst="roundRect">
+            <a:avLst/>
+          </a:prstGeom>
+          <a:solidFill>
+            <a:schemeClr val="bg1"/>
+          </a:solidFill>
+          <a:ln>
+            <a:solidFill>
+              <a:srgbClr val="D0E8F7"/>
+            </a:solidFill>
+          </a:ln>
+        </p:spPr>
+        <p:style>
+          <a:lnRef idx="2">
+            <a:schemeClr val="accent1">
+              <a:lumMod val="75000"/>
+            </a:schemeClr>
+          </a:lnRef>
+          <a:fillRef idx="1">
+            <a:schemeClr val="accent1"/>
+          </a:fillRef>
+          <a:effectRef idx="0">
+            <a:srgbClr val="FFFFFF"/>
+          </a:effectRef>
+          <a:fontRef idx="minor">
+            <a:schemeClr val="lt1"/>
+          </a:fontRef>
+        </p:style>
+        <p:txBody>
+          <a:bodyPr rtlCol="0" anchor="ctr"/>
+          <a:p>
+            <a:pPr algn="ctr"/>
+            <a:endParaRPr lang="zh-CN" altLang="en-US"/>
+          </a:p>
+        </p:txBody>
+      </p:sp>
+      <p:sp>
+        <p:nvSpPr>
+          <p:cNvPr id="2" name="标题 1"/>
+          <p:cNvSpPr>
+            <a:spLocks noGrp="1"/>
+          </p:cNvSpPr>
+          <p:nvPr>
+            <p:ph type="title"/>
+          </p:nvPr>
+        </p:nvSpPr>
+        <p:spPr/>
+        <p:txBody>
+          <a:bodyPr>
+            <a:scene3d>
+              <a:camera prst="orthographicFront"/>
+              <a:lightRig rig="threePt" dir="t"/>
+            </a:scene3d>
+          </a:bodyPr>
+          <a:lstStyle>
+            <a:lvl1pPr>
+              <a:defRPr>
+                <a:solidFill>
+                  <a:srgbClr val="2E5EAA"/>
+                </a:solidFill>
+                <a:effectLst>
+                  <a:outerShdw blurRad="38100" dist="25400" dir="5400000" algn="ctr" rotWithShape="0">
+                    <a:srgbClr val="6E747A">
+                      <a:alpha val="43000"/>
+                    </a:srgbClr>
+                  </a:outerShdw>
+                </a:effectLst>
+              </a:defRPr>
+            </a:lvl1pPr>
+          </a:lstStyle>
+          <a:p>
+            <a:r>
+              <a:rPr lang="zh-CN" altLang="en-US" smtClean="0"/>
+              <a:t>单击此处编辑母版标题样式</a:t>
+            </a:r>
+            <a:endParaRPr lang="zh-CN" altLang="en-US"/>
+          </a:p>
+        </p:txBody>
+      </p:sp>
+      <p:sp>
+        <p:nvSpPr>
+          <p:cNvPr id="3" name="日期占位符 2"/>
+          <p:cNvSpPr>
+            <a:spLocks noGrp="1"/>
+          </p:cNvSpPr>
+          <p:nvPr>
+            <p:ph type="dt" sz="half" idx="10"/>
+          </p:nvPr>
+        </p:nvSpPr>
+        <p:spPr/>
+        <p:txBody>
+          <a:bodyPr/>
+          <a:lstStyle/>
+          <a:p>
+            <a:fld id="{760FBDFE-C587-4B4C-A407-44438C67B59E}" type="datetimeFigureOut">
+              <a:rPr lang="zh-CN" altLang="en-US" smtClean="0"/>
+            </a:fld>
+            <a:endParaRPr lang="zh-CN" altLang="en-US"/>
+          </a:p>
+        </p:txBody>
+      </p:sp>
+      <p:sp>
+        <p:nvSpPr>
+          <p:cNvPr id="4" name="页脚占位符 3"/>
+          <p:cNvSpPr>
+            <a:spLocks noGrp="1"/>
+          </p:cNvSpPr>
+          <p:nvPr>
+            <p:ph type="ftr" sz="quarter" idx="11"/>
+          </p:nvPr>
+        </p:nvSpPr>
+        <p:spPr/>
+        <p:txBody>
+          <a:bodyPr/>
+          <a:lstStyle/>
+          <a:p>
+            <a:endParaRPr lang="zh-CN" altLang="en-US" dirty="0"/>
+          </a:p>
+        </p:txBody>
+      </p:sp>
+      <p:sp>
+        <p:nvSpPr>
+          <p:cNvPr id="5" name="灯片编号占位符 4"/>
+          <p:cNvSpPr>
+            <a:spLocks noGrp="1"/>
+          </p:cNvSpPr>
+          <p:nvPr>
+            <p:ph type="sldNum" sz="quarter" idx="12"/>
+          </p:nvPr>
+        </p:nvSpPr>
+        <p:spPr/>
+        <p:txBody>
+          <a:bodyPr/>
+          <a:lstStyle/>
+          <a:p>
+            <a:fld id="{49AE70B2-8BF9-45C0-BB95-33D1B9D3A854}" type="slidenum">
+              <a:rPr lang="zh-CN" altLang="en-US" smtClean="0"/>
+            </a:fld>
+            <a:endParaRPr lang="zh-CN" altLang="en-US" dirty="0"/>
+          </a:p>
+        </p:txBody>
+      </p:sp>
+      <p:sp>
+        <p:nvSpPr>
           <p:cNvPr id="9" name="文本占位符 8"/>
           <p:cNvSpPr>
             <a:spLocks noGrp="1"/>
@@ -2044,7 +2442,13 @@
           </a:bodyPr>
           <a:lstStyle>
             <a:lvl1pPr>
-              <a:defRPr sz="2000"/>
+              <a:defRPr sz="2000">
+                <a:ln w="15875"/>
+                <a:solidFill>
+                  <a:srgbClr val="4A8BC2"/>
+                </a:solidFill>
+                <a:effectLst/>
+              </a:defRPr>
             </a:lvl1pPr>
             <a:lvl5pPr marL="1828800" indent="0">
               <a:buNone/>
@@ -2073,12 +2477,21 @@
         </p:nvSpPr>
         <p:spPr>
           <a:xfrm>
-            <a:off x="780415" y="3190875"/>
+            <a:off x="816610" y="3553460"/>
             <a:ext cx="2400300" cy="1977390"/>
           </a:xfrm>
         </p:spPr>
         <p:txBody>
           <a:bodyPr/>
+          <a:lstStyle>
+            <a:lvl1pPr>
+              <a:defRPr>
+                <a:solidFill>
+                  <a:srgbClr val="444444"/>
+                </a:solidFill>
+              </a:defRPr>
+            </a:lvl1pPr>
+          </a:lstStyle>
           <a:p>
             <a:pPr lvl="0"/>
             <a:r>
@@ -2111,7 +2524,13 @@
           </a:bodyPr>
           <a:lstStyle>
             <a:lvl1pPr>
-              <a:defRPr sz="2000"/>
+              <a:defRPr sz="2000">
+                <a:ln w="15875"/>
+                <a:solidFill>
+                  <a:srgbClr val="4A8BC2"/>
+                </a:solidFill>
+                <a:effectLst/>
+              </a:defRPr>
             </a:lvl1pPr>
           </a:lstStyle>
           <a:p>
@@ -2136,12 +2555,21 @@
         </p:nvSpPr>
         <p:spPr>
           <a:xfrm>
-            <a:off x="4749165" y="3191510"/>
+            <a:off x="4721225" y="3553460"/>
             <a:ext cx="2269490" cy="1976755"/>
           </a:xfrm>
         </p:spPr>
         <p:txBody>
           <a:bodyPr/>
+          <a:lstStyle>
+            <a:lvl1pPr>
+              <a:defRPr>
+                <a:solidFill>
+                  <a:srgbClr val="444444"/>
+                </a:solidFill>
+              </a:defRPr>
+            </a:lvl1pPr>
+          </a:lstStyle>
           <a:p>
             <a:pPr lvl="0"/>
             <a:r>
@@ -2164,7 +2592,7 @@
         </p:nvSpPr>
         <p:spPr>
           <a:xfrm>
-            <a:off x="8681720" y="2439035"/>
+            <a:off x="8689340" y="2439035"/>
             <a:ext cx="2378710" cy="503555"/>
           </a:xfrm>
         </p:spPr>
@@ -2174,7 +2602,13 @@
           </a:bodyPr>
           <a:lstStyle>
             <a:lvl1pPr>
-              <a:defRPr sz="2000"/>
+              <a:defRPr sz="2000">
+                <a:ln w="15875"/>
+                <a:solidFill>
+                  <a:srgbClr val="4A8BC2"/>
+                </a:solidFill>
+                <a:effectLst/>
+              </a:defRPr>
             </a:lvl1pPr>
           </a:lstStyle>
           <a:p>
@@ -2199,12 +2633,21 @@
         </p:nvSpPr>
         <p:spPr>
           <a:xfrm>
-            <a:off x="8747760" y="3191510"/>
+            <a:off x="8791575" y="3553460"/>
             <a:ext cx="2320290" cy="1975485"/>
           </a:xfrm>
         </p:spPr>
         <p:txBody>
           <a:bodyPr/>
+          <a:lstStyle>
+            <a:lvl1pPr>
+              <a:defRPr>
+                <a:solidFill>
+                  <a:srgbClr val="444444"/>
+                </a:solidFill>
+              </a:defRPr>
+            </a:lvl1pPr>
+          </a:lstStyle>
           <a:p>
             <a:pPr lvl="0"/>
             <a:r>
@@ -2253,6 +2696,382 @@
       </p:grpSpPr>
       <p:sp>
         <p:nvSpPr>
+          <p:cNvPr id="22" name="圆角矩形 21"/>
+          <p:cNvSpPr/>
+          <p:nvPr userDrawn="1"/>
+        </p:nvSpPr>
+        <p:spPr>
+          <a:xfrm>
+            <a:off x="8990965" y="2113915"/>
+            <a:ext cx="2192655" cy="3521710"/>
+          </a:xfrm>
+          <a:prstGeom prst="roundRect">
+            <a:avLst/>
+          </a:prstGeom>
+          <a:solidFill>
+            <a:srgbClr val="E0F0FC">
+              <a:alpha val="87000"/>
+            </a:srgbClr>
+          </a:solidFill>
+          <a:ln>
+            <a:noFill/>
+          </a:ln>
+        </p:spPr>
+        <p:style>
+          <a:lnRef idx="2">
+            <a:schemeClr val="accent1">
+              <a:lumMod val="75000"/>
+            </a:schemeClr>
+          </a:lnRef>
+          <a:fillRef idx="1">
+            <a:schemeClr val="accent1"/>
+          </a:fillRef>
+          <a:effectRef idx="0">
+            <a:srgbClr val="FFFFFF"/>
+          </a:effectRef>
+          <a:fontRef idx="minor">
+            <a:schemeClr val="lt1"/>
+          </a:fontRef>
+        </p:style>
+        <p:txBody>
+          <a:bodyPr rtlCol="0" anchor="ctr"/>
+          <a:p>
+            <a:pPr algn="ctr"/>
+            <a:endParaRPr lang="zh-CN" altLang="en-US"/>
+          </a:p>
+        </p:txBody>
+      </p:sp>
+      <p:sp>
+        <p:nvSpPr>
+          <p:cNvPr id="9" name="圆角矩形 8"/>
+          <p:cNvSpPr/>
+          <p:nvPr userDrawn="1"/>
+        </p:nvSpPr>
+        <p:spPr>
+          <a:xfrm>
+            <a:off x="8991600" y="3166110"/>
+            <a:ext cx="2192655" cy="2469515"/>
+          </a:xfrm>
+          <a:prstGeom prst="roundRect">
+            <a:avLst/>
+          </a:prstGeom>
+          <a:solidFill>
+            <a:schemeClr val="bg1"/>
+          </a:solidFill>
+          <a:ln>
+            <a:solidFill>
+              <a:srgbClr val="D0E8F7"/>
+            </a:solidFill>
+          </a:ln>
+        </p:spPr>
+        <p:style>
+          <a:lnRef idx="2">
+            <a:schemeClr val="accent1">
+              <a:lumMod val="75000"/>
+            </a:schemeClr>
+          </a:lnRef>
+          <a:fillRef idx="1">
+            <a:schemeClr val="accent1"/>
+          </a:fillRef>
+          <a:effectRef idx="0">
+            <a:srgbClr val="FFFFFF"/>
+          </a:effectRef>
+          <a:fontRef idx="minor">
+            <a:schemeClr val="lt1"/>
+          </a:fontRef>
+        </p:style>
+        <p:txBody>
+          <a:bodyPr rtlCol="0" anchor="ctr"/>
+          <a:p>
+            <a:pPr algn="ctr"/>
+            <a:endParaRPr lang="zh-CN" altLang="en-US"/>
+          </a:p>
+        </p:txBody>
+      </p:sp>
+      <p:sp>
+        <p:nvSpPr>
+          <p:cNvPr id="21" name="圆角矩形 20"/>
+          <p:cNvSpPr/>
+          <p:nvPr userDrawn="1"/>
+        </p:nvSpPr>
+        <p:spPr>
+          <a:xfrm>
+            <a:off x="6144260" y="2160905"/>
+            <a:ext cx="2192655" cy="3521710"/>
+          </a:xfrm>
+          <a:prstGeom prst="roundRect">
+            <a:avLst/>
+          </a:prstGeom>
+          <a:solidFill>
+            <a:srgbClr val="E0F0FC">
+              <a:alpha val="87000"/>
+            </a:srgbClr>
+          </a:solidFill>
+          <a:ln>
+            <a:noFill/>
+          </a:ln>
+        </p:spPr>
+        <p:style>
+          <a:lnRef idx="2">
+            <a:schemeClr val="accent1">
+              <a:lumMod val="75000"/>
+            </a:schemeClr>
+          </a:lnRef>
+          <a:fillRef idx="1">
+            <a:schemeClr val="accent1"/>
+          </a:fillRef>
+          <a:effectRef idx="0">
+            <a:srgbClr val="FFFFFF"/>
+          </a:effectRef>
+          <a:fontRef idx="minor">
+            <a:schemeClr val="lt1"/>
+          </a:fontRef>
+        </p:style>
+        <p:txBody>
+          <a:bodyPr rtlCol="0" anchor="ctr"/>
+          <a:p>
+            <a:pPr algn="ctr"/>
+            <a:endParaRPr lang="zh-CN" altLang="en-US"/>
+          </a:p>
+        </p:txBody>
+      </p:sp>
+      <p:sp>
+        <p:nvSpPr>
+          <p:cNvPr id="20" name="圆角矩形 19"/>
+          <p:cNvSpPr/>
+          <p:nvPr userDrawn="1"/>
+        </p:nvSpPr>
+        <p:spPr>
+          <a:xfrm>
+            <a:off x="3473450" y="2160905"/>
+            <a:ext cx="2192655" cy="3521710"/>
+          </a:xfrm>
+          <a:prstGeom prst="roundRect">
+            <a:avLst/>
+          </a:prstGeom>
+          <a:solidFill>
+            <a:srgbClr val="E0F0FC">
+              <a:alpha val="87000"/>
+            </a:srgbClr>
+          </a:solidFill>
+          <a:ln>
+            <a:noFill/>
+          </a:ln>
+        </p:spPr>
+        <p:style>
+          <a:lnRef idx="2">
+            <a:schemeClr val="accent1">
+              <a:lumMod val="75000"/>
+            </a:schemeClr>
+          </a:lnRef>
+          <a:fillRef idx="1">
+            <a:schemeClr val="accent1"/>
+          </a:fillRef>
+          <a:effectRef idx="0">
+            <a:srgbClr val="FFFFFF"/>
+          </a:effectRef>
+          <a:fontRef idx="minor">
+            <a:schemeClr val="lt1"/>
+          </a:fontRef>
+        </p:style>
+        <p:txBody>
+          <a:bodyPr rtlCol="0" anchor="ctr"/>
+          <a:p>
+            <a:pPr algn="ctr"/>
+            <a:endParaRPr lang="zh-CN" altLang="en-US"/>
+          </a:p>
+        </p:txBody>
+      </p:sp>
+      <p:sp>
+        <p:nvSpPr>
+          <p:cNvPr id="19" name="圆角矩形 18"/>
+          <p:cNvSpPr/>
+          <p:nvPr userDrawn="1"/>
+        </p:nvSpPr>
+        <p:spPr>
+          <a:xfrm>
+            <a:off x="611505" y="2160905"/>
+            <a:ext cx="2192655" cy="3521710"/>
+          </a:xfrm>
+          <a:prstGeom prst="roundRect">
+            <a:avLst/>
+          </a:prstGeom>
+          <a:solidFill>
+            <a:srgbClr val="E0F0FC">
+              <a:alpha val="87000"/>
+            </a:srgbClr>
+          </a:solidFill>
+          <a:ln>
+            <a:noFill/>
+          </a:ln>
+        </p:spPr>
+        <p:style>
+          <a:lnRef idx="2">
+            <a:schemeClr val="accent1">
+              <a:lumMod val="75000"/>
+            </a:schemeClr>
+          </a:lnRef>
+          <a:fillRef idx="1">
+            <a:schemeClr val="accent1"/>
+          </a:fillRef>
+          <a:effectRef idx="0">
+            <a:srgbClr val="FFFFFF"/>
+          </a:effectRef>
+          <a:fontRef idx="minor">
+            <a:schemeClr val="lt1"/>
+          </a:fontRef>
+        </p:style>
+        <p:txBody>
+          <a:bodyPr rtlCol="0" anchor="ctr"/>
+          <a:p>
+            <a:pPr algn="ctr"/>
+            <a:endParaRPr lang="zh-CN" altLang="en-US"/>
+          </a:p>
+        </p:txBody>
+      </p:sp>
+      <p:sp>
+        <p:nvSpPr>
+          <p:cNvPr id="6" name="圆角矩形 5"/>
+          <p:cNvSpPr/>
+          <p:nvPr userDrawn="1"/>
+        </p:nvSpPr>
+        <p:spPr>
+          <a:xfrm>
+            <a:off x="611505" y="3212465"/>
+            <a:ext cx="2192655" cy="2469515"/>
+          </a:xfrm>
+          <a:prstGeom prst="roundRect">
+            <a:avLst/>
+          </a:prstGeom>
+          <a:solidFill>
+            <a:schemeClr val="bg1"/>
+          </a:solidFill>
+          <a:ln>
+            <a:solidFill>
+              <a:srgbClr val="D0E8F7"/>
+            </a:solidFill>
+          </a:ln>
+        </p:spPr>
+        <p:style>
+          <a:lnRef idx="2">
+            <a:schemeClr val="accent1">
+              <a:lumMod val="75000"/>
+            </a:schemeClr>
+          </a:lnRef>
+          <a:fillRef idx="1">
+            <a:schemeClr val="accent1"/>
+          </a:fillRef>
+          <a:effectRef idx="0">
+            <a:srgbClr val="FFFFFF"/>
+          </a:effectRef>
+          <a:fontRef idx="minor">
+            <a:schemeClr val="lt1"/>
+          </a:fontRef>
+        </p:style>
+        <p:txBody>
+          <a:bodyPr rtlCol="0" anchor="ctr"/>
+          <a:p>
+            <a:pPr algn="ctr"/>
+            <a:endParaRPr lang="zh-CN" altLang="en-US"/>
+          </a:p>
+        </p:txBody>
+      </p:sp>
+      <p:sp>
+        <p:nvSpPr>
+          <p:cNvPr id="8" name="圆角矩形 7"/>
+          <p:cNvSpPr/>
+          <p:nvPr userDrawn="1"/>
+        </p:nvSpPr>
+        <p:spPr>
+          <a:xfrm>
+            <a:off x="3473450" y="3212465"/>
+            <a:ext cx="2192655" cy="2469515"/>
+          </a:xfrm>
+          <a:prstGeom prst="roundRect">
+            <a:avLst/>
+          </a:prstGeom>
+          <a:solidFill>
+            <a:schemeClr val="bg1"/>
+          </a:solidFill>
+          <a:ln>
+            <a:solidFill>
+              <a:srgbClr val="D0E8F7"/>
+            </a:solidFill>
+          </a:ln>
+        </p:spPr>
+        <p:style>
+          <a:lnRef idx="2">
+            <a:schemeClr val="accent1">
+              <a:lumMod val="75000"/>
+            </a:schemeClr>
+          </a:lnRef>
+          <a:fillRef idx="1">
+            <a:schemeClr val="accent1"/>
+          </a:fillRef>
+          <a:effectRef idx="0">
+            <a:srgbClr val="FFFFFF"/>
+          </a:effectRef>
+          <a:fontRef idx="minor">
+            <a:schemeClr val="lt1"/>
+          </a:fontRef>
+        </p:style>
+        <p:txBody>
+          <a:bodyPr rtlCol="0" anchor="ctr"/>
+          <a:p>
+            <a:pPr algn="ctr"/>
+            <a:endParaRPr lang="zh-CN" altLang="en-US"/>
+          </a:p>
+        </p:txBody>
+      </p:sp>
+      <p:sp>
+        <p:nvSpPr>
+          <p:cNvPr id="7" name="圆角矩形 6"/>
+          <p:cNvSpPr/>
+          <p:nvPr userDrawn="1"/>
+        </p:nvSpPr>
+        <p:spPr>
+          <a:xfrm>
+            <a:off x="6144260" y="3212465"/>
+            <a:ext cx="2192655" cy="2469515"/>
+          </a:xfrm>
+          <a:prstGeom prst="roundRect">
+            <a:avLst/>
+          </a:prstGeom>
+          <a:solidFill>
+            <a:schemeClr val="bg1"/>
+          </a:solidFill>
+          <a:ln>
+            <a:solidFill>
+              <a:srgbClr val="D0E8F7"/>
+            </a:solidFill>
+          </a:ln>
+        </p:spPr>
+        <p:style>
+          <a:lnRef idx="2">
+            <a:schemeClr val="accent1">
+              <a:lumMod val="75000"/>
+            </a:schemeClr>
+          </a:lnRef>
+          <a:fillRef idx="1">
+            <a:schemeClr val="accent1"/>
+          </a:fillRef>
+          <a:effectRef idx="0">
+            <a:srgbClr val="FFFFFF"/>
+          </a:effectRef>
+          <a:fontRef idx="minor">
+            <a:schemeClr val="lt1"/>
+          </a:fontRef>
+        </p:style>
+        <p:txBody>
+          <a:bodyPr rtlCol="0" anchor="ctr"/>
+          <a:p>
+            <a:pPr algn="ctr"/>
+            <a:endParaRPr lang="zh-CN" altLang="en-US"/>
+          </a:p>
+        </p:txBody>
+      </p:sp>
+      <p:sp>
+        <p:nvSpPr>
           <p:cNvPr id="2" name="标题 1"/>
           <p:cNvSpPr>
             <a:spLocks noGrp="1"/>
@@ -2359,193 +3178,62 @@
       </p:sp>
       <p:sp>
         <p:nvSpPr>
-          <p:cNvPr id="6" name="矩形 5"/>
-          <p:cNvSpPr/>
-          <p:nvPr userDrawn="1"/>
-        </p:nvSpPr>
-        <p:spPr>
-          <a:xfrm>
-            <a:off x="612140" y="2176780"/>
-            <a:ext cx="2182495" cy="3145155"/>
-          </a:xfrm>
-          <a:prstGeom prst="rect">
-            <a:avLst/>
-          </a:prstGeom>
-          <a:solidFill>
-            <a:schemeClr val="bg1">
-              <a:alpha val="80000"/>
-            </a:schemeClr>
-          </a:solidFill>
-        </p:spPr>
-        <p:style>
-          <a:lnRef idx="2">
-            <a:schemeClr val="accent1">
-              <a:lumMod val="75000"/>
-            </a:schemeClr>
-          </a:lnRef>
-          <a:fillRef idx="1">
-            <a:schemeClr val="accent1"/>
-          </a:fillRef>
-          <a:effectRef idx="0">
-            <a:srgbClr val="FFFFFF"/>
-          </a:effectRef>
-          <a:fontRef idx="minor">
-            <a:schemeClr val="lt1"/>
-          </a:fontRef>
-        </p:style>
-        <p:txBody>
-          <a:bodyPr rtlCol="0" anchor="ctr"/>
-          <a:p>
-            <a:pPr algn="ctr"/>
-            <a:endParaRPr lang="zh-CN" altLang="en-US"/>
-          </a:p>
-        </p:txBody>
-      </p:sp>
-      <p:sp>
-        <p:nvSpPr>
-          <p:cNvPr id="7" name="矩形 6"/>
-          <p:cNvSpPr/>
-          <p:nvPr userDrawn="1"/>
-        </p:nvSpPr>
-        <p:spPr>
-          <a:xfrm>
-            <a:off x="3478530" y="2176780"/>
-            <a:ext cx="2182495" cy="3145155"/>
-          </a:xfrm>
-          <a:prstGeom prst="rect">
-            <a:avLst/>
-          </a:prstGeom>
-          <a:solidFill>
-            <a:schemeClr val="bg1">
-              <a:alpha val="80000"/>
-            </a:schemeClr>
-          </a:solidFill>
-        </p:spPr>
-        <p:style>
-          <a:lnRef idx="2">
-            <a:schemeClr val="accent1">
-              <a:lumMod val="75000"/>
-            </a:schemeClr>
-          </a:lnRef>
-          <a:fillRef idx="1">
-            <a:schemeClr val="accent1"/>
-          </a:fillRef>
-          <a:effectRef idx="0">
-            <a:srgbClr val="FFFFFF"/>
-          </a:effectRef>
-          <a:fontRef idx="minor">
-            <a:schemeClr val="lt1"/>
-          </a:fontRef>
-        </p:style>
-        <p:txBody>
-          <a:bodyPr rtlCol="0" anchor="ctr"/>
-          <a:p>
-            <a:pPr algn="ctr"/>
-            <a:endParaRPr lang="zh-CN" altLang="en-US"/>
-          </a:p>
-        </p:txBody>
-      </p:sp>
-      <p:sp>
-        <p:nvSpPr>
-          <p:cNvPr id="8" name="矩形 7"/>
-          <p:cNvSpPr/>
-          <p:nvPr userDrawn="1"/>
-        </p:nvSpPr>
-        <p:spPr>
-          <a:xfrm>
-            <a:off x="6149340" y="2176780"/>
-            <a:ext cx="2182495" cy="3145155"/>
-          </a:xfrm>
-          <a:prstGeom prst="rect">
-            <a:avLst/>
-          </a:prstGeom>
-          <a:solidFill>
-            <a:schemeClr val="bg1">
-              <a:alpha val="80000"/>
-            </a:schemeClr>
-          </a:solidFill>
-        </p:spPr>
-        <p:style>
-          <a:lnRef idx="2">
-            <a:schemeClr val="accent1">
-              <a:lumMod val="75000"/>
-            </a:schemeClr>
-          </a:lnRef>
-          <a:fillRef idx="1">
-            <a:schemeClr val="accent1"/>
-          </a:fillRef>
-          <a:effectRef idx="0">
-            <a:srgbClr val="FFFFFF"/>
-          </a:effectRef>
-          <a:fontRef idx="minor">
-            <a:schemeClr val="lt1"/>
-          </a:fontRef>
-        </p:style>
-        <p:txBody>
-          <a:bodyPr rtlCol="0" anchor="ctr"/>
-          <a:p>
-            <a:pPr algn="ctr"/>
-            <a:endParaRPr lang="zh-CN" altLang="en-US"/>
-          </a:p>
-        </p:txBody>
-      </p:sp>
-      <p:sp>
-        <p:nvSpPr>
-          <p:cNvPr id="9" name="矩形 8"/>
-          <p:cNvSpPr/>
-          <p:nvPr userDrawn="1"/>
-        </p:nvSpPr>
-        <p:spPr>
-          <a:xfrm>
-            <a:off x="8990965" y="2176780"/>
-            <a:ext cx="2182495" cy="3145155"/>
-          </a:xfrm>
-          <a:prstGeom prst="rect">
-            <a:avLst/>
-          </a:prstGeom>
-          <a:solidFill>
-            <a:schemeClr val="bg1">
-              <a:alpha val="80000"/>
-            </a:schemeClr>
-          </a:solidFill>
-        </p:spPr>
-        <p:style>
-          <a:lnRef idx="2">
-            <a:schemeClr val="accent1">
-              <a:lumMod val="75000"/>
-            </a:schemeClr>
-          </a:lnRef>
-          <a:fillRef idx="1">
-            <a:schemeClr val="accent1"/>
-          </a:fillRef>
-          <a:effectRef idx="0">
-            <a:srgbClr val="FFFFFF"/>
-          </a:effectRef>
-          <a:fontRef idx="minor">
-            <a:schemeClr val="lt1"/>
-          </a:fontRef>
-        </p:style>
-        <p:txBody>
-          <a:bodyPr rtlCol="0" anchor="ctr"/>
-          <a:p>
-            <a:pPr algn="ctr"/>
-            <a:endParaRPr lang="zh-CN" altLang="en-US"/>
-          </a:p>
-        </p:txBody>
-      </p:sp>
-      <p:sp>
-        <p:nvSpPr>
           <p:cNvPr id="10" name="文本占位符 9"/>
           <p:cNvSpPr>
             <a:spLocks noGrp="1"/>
           </p:cNvSpPr>
           <p:nvPr>
-            <p:ph type="body" idx="13"/>
+            <p:ph type="body" idx="13" hasCustomPrompt="1"/>
           </p:nvPr>
         </p:nvSpPr>
         <p:spPr>
           <a:xfrm>
             <a:off x="816610" y="2491105"/>
+            <a:ext cx="1810385" cy="452120"/>
+          </a:xfrm>
+        </p:spPr>
+        <p:txBody>
+          <a:bodyPr>
+            <a:noAutofit/>
+            <a:scene3d>
+              <a:camera prst="orthographicFront"/>
+              <a:lightRig rig="threePt" dir="t"/>
+            </a:scene3d>
+          </a:bodyPr>
+          <a:lstStyle>
+            <a:lvl1pPr>
+              <a:defRPr sz="2000">
+                <a:ln w="15875"/>
+                <a:solidFill>
+                  <a:srgbClr val="4A8BC2"/>
+                </a:solidFill>
+                <a:effectLst/>
+              </a:defRPr>
+            </a:lvl1pPr>
+            <a:lvl5pPr marL="1828800" indent="0">
+              <a:buNone/>
+              <a:defRPr/>
+            </a:lvl5pPr>
+          </a:lstStyle>
+          <a:p>
+            <a:pPr lvl="0"/>
+            <a:endParaRPr lang="zh-CN" altLang="en-US" smtClean="0"/>
+          </a:p>
+        </p:txBody>
+      </p:sp>
+      <p:sp>
+        <p:nvSpPr>
+          <p:cNvPr id="12" name="文本占位符 11"/>
+          <p:cNvSpPr>
+            <a:spLocks noGrp="1"/>
+          </p:cNvSpPr>
+          <p:nvPr>
+            <p:ph type="body" idx="14"/>
+          </p:nvPr>
+        </p:nvSpPr>
+        <p:spPr>
+          <a:xfrm>
+            <a:off x="3679825" y="2491105"/>
             <a:ext cx="1810385" cy="452120"/>
           </a:xfrm>
         </p:spPr>
@@ -2555,7 +3243,13 @@
           </a:bodyPr>
           <a:lstStyle>
             <a:lvl1pPr>
-              <a:defRPr sz="2000"/>
+              <a:defRPr sz="2000">
+                <a:ln w="15875"/>
+                <a:solidFill>
+                  <a:srgbClr val="4A8BC2"/>
+                </a:solidFill>
+                <a:effectLst/>
+              </a:defRPr>
             </a:lvl1pPr>
             <a:lvl5pPr marL="1828800" indent="0">
               <a:buNone/>
@@ -2574,17 +3268,17 @@
       </p:sp>
       <p:sp>
         <p:nvSpPr>
-          <p:cNvPr id="12" name="文本占位符 11"/>
-          <p:cNvSpPr>
-            <a:spLocks noGrp="1"/>
-          </p:cNvSpPr>
-          <p:nvPr>
-            <p:ph type="body" idx="14"/>
-          </p:nvPr>
-        </p:nvSpPr>
-        <p:spPr>
-          <a:xfrm>
-            <a:off x="3679825" y="2491105"/>
+          <p:cNvPr id="13" name="文本占位符 12"/>
+          <p:cNvSpPr>
+            <a:spLocks noGrp="1"/>
+          </p:cNvSpPr>
+          <p:nvPr>
+            <p:ph type="body" idx="15"/>
+          </p:nvPr>
+        </p:nvSpPr>
+        <p:spPr>
+          <a:xfrm>
+            <a:off x="6335395" y="2491105"/>
             <a:ext cx="1810385" cy="452120"/>
           </a:xfrm>
         </p:spPr>
@@ -2594,7 +3288,13 @@
           </a:bodyPr>
           <a:lstStyle>
             <a:lvl1pPr>
-              <a:defRPr sz="2000"/>
+              <a:defRPr sz="2000">
+                <a:ln w="15875"/>
+                <a:solidFill>
+                  <a:srgbClr val="4A8BC2"/>
+                </a:solidFill>
+                <a:effectLst/>
+              </a:defRPr>
             </a:lvl1pPr>
             <a:lvl5pPr marL="1828800" indent="0">
               <a:buNone/>
@@ -2613,17 +3313,17 @@
       </p:sp>
       <p:sp>
         <p:nvSpPr>
-          <p:cNvPr id="13" name="文本占位符 12"/>
-          <p:cNvSpPr>
-            <a:spLocks noGrp="1"/>
-          </p:cNvSpPr>
-          <p:nvPr>
-            <p:ph type="body" idx="15"/>
-          </p:nvPr>
-        </p:nvSpPr>
-        <p:spPr>
-          <a:xfrm>
-            <a:off x="6335395" y="2491105"/>
+          <p:cNvPr id="14" name="文本占位符 13"/>
+          <p:cNvSpPr>
+            <a:spLocks noGrp="1"/>
+          </p:cNvSpPr>
+          <p:nvPr>
+            <p:ph type="body" idx="16"/>
+          </p:nvPr>
+        </p:nvSpPr>
+        <p:spPr>
+          <a:xfrm>
+            <a:off x="9177655" y="2428875"/>
             <a:ext cx="1810385" cy="452120"/>
           </a:xfrm>
         </p:spPr>
@@ -2633,7 +3333,13 @@
           </a:bodyPr>
           <a:lstStyle>
             <a:lvl1pPr>
-              <a:defRPr sz="2000"/>
+              <a:defRPr sz="2000">
+                <a:ln w="15875"/>
+                <a:solidFill>
+                  <a:srgbClr val="4A8BC2"/>
+                </a:solidFill>
+                <a:effectLst/>
+              </a:defRPr>
             </a:lvl1pPr>
             <a:lvl5pPr marL="1828800" indent="0">
               <a:buNone/>
@@ -2652,45 +3358,6 @@
       </p:sp>
       <p:sp>
         <p:nvSpPr>
-          <p:cNvPr id="14" name="文本占位符 13"/>
-          <p:cNvSpPr>
-            <a:spLocks noGrp="1"/>
-          </p:cNvSpPr>
-          <p:nvPr>
-            <p:ph type="body" idx="16"/>
-          </p:nvPr>
-        </p:nvSpPr>
-        <p:spPr>
-          <a:xfrm>
-            <a:off x="9177020" y="2491105"/>
-            <a:ext cx="1810385" cy="452120"/>
-          </a:xfrm>
-        </p:spPr>
-        <p:txBody>
-          <a:bodyPr>
-            <a:noAutofit/>
-          </a:bodyPr>
-          <a:lstStyle>
-            <a:lvl1pPr>
-              <a:defRPr sz="2000"/>
-            </a:lvl1pPr>
-            <a:lvl5pPr marL="1828800" indent="0">
-              <a:buNone/>
-              <a:defRPr/>
-            </a:lvl5pPr>
-          </a:lstStyle>
-          <a:p>
-            <a:pPr lvl="0"/>
-            <a:r>
-              <a:rPr lang="zh-CN" altLang="en-US" smtClean="0"/>
-              <a:t>单击此处编辑母版文本样式</a:t>
-            </a:r>
-            <a:endParaRPr lang="zh-CN" altLang="en-US" smtClean="0"/>
-          </a:p>
-        </p:txBody>
-      </p:sp>
-      <p:sp>
-        <p:nvSpPr>
           <p:cNvPr id="15" name="内容占位符 14"/>
           <p:cNvSpPr>
             <a:spLocks noGrp="1"/>
@@ -2701,7 +3368,7 @@
         </p:nvSpPr>
         <p:spPr>
           <a:xfrm>
-            <a:off x="815975" y="3125470"/>
+            <a:off x="815975" y="3796665"/>
             <a:ext cx="1811020" cy="1838960"/>
           </a:xfrm>
         </p:spPr>
@@ -2725,7 +3392,7 @@
         </p:nvSpPr>
         <p:spPr>
           <a:xfrm>
-            <a:off x="3679190" y="3125470"/>
+            <a:off x="3723005" y="3796665"/>
             <a:ext cx="1811020" cy="1838960"/>
           </a:xfrm>
         </p:spPr>
@@ -2749,7 +3416,7 @@
         </p:nvSpPr>
         <p:spPr>
           <a:xfrm>
-            <a:off x="6335395" y="3125470"/>
+            <a:off x="6356985" y="3796665"/>
             <a:ext cx="1811020" cy="1838960"/>
           </a:xfrm>
         </p:spPr>
@@ -2773,7 +3440,7 @@
         </p:nvSpPr>
         <p:spPr>
           <a:xfrm>
-            <a:off x="9177020" y="3125470"/>
+            <a:off x="9272270" y="3796665"/>
             <a:ext cx="1811020" cy="1838960"/>
           </a:xfrm>
         </p:spPr>
@@ -2825,6 +3492,357 @@
       </p:grpSpPr>
       <p:sp>
         <p:nvSpPr>
+          <p:cNvPr id="8" name="圆角矩形 7"/>
+          <p:cNvSpPr/>
+          <p:nvPr userDrawn="1"/>
+        </p:nvSpPr>
+        <p:spPr>
+          <a:xfrm>
+            <a:off x="4859020" y="4042410"/>
+            <a:ext cx="6748780" cy="977265"/>
+          </a:xfrm>
+          <a:prstGeom prst="roundRect">
+            <a:avLst/>
+          </a:prstGeom>
+          <a:solidFill>
+            <a:schemeClr val="bg1">
+              <a:alpha val="80000"/>
+            </a:schemeClr>
+          </a:solidFill>
+          <a:ln>
+            <a:gradFill>
+              <a:gsLst>
+                <a:gs pos="0">
+                  <a:schemeClr val="accent1">
+                    <a:lumMod val="5000"/>
+                    <a:lumOff val="95000"/>
+                  </a:schemeClr>
+                </a:gs>
+                <a:gs pos="74000">
+                  <a:schemeClr val="accent1">
+                    <a:lumMod val="45000"/>
+                    <a:lumOff val="55000"/>
+                  </a:schemeClr>
+                </a:gs>
+                <a:gs pos="83000">
+                  <a:schemeClr val="accent1">
+                    <a:lumMod val="45000"/>
+                    <a:lumOff val="55000"/>
+                  </a:schemeClr>
+                </a:gs>
+                <a:gs pos="100000">
+                  <a:schemeClr val="accent1">
+                    <a:lumMod val="30000"/>
+                    <a:lumOff val="70000"/>
+                  </a:schemeClr>
+                </a:gs>
+              </a:gsLst>
+              <a:lin ang="5400000" scaled="1"/>
+            </a:gradFill>
+          </a:ln>
+        </p:spPr>
+        <p:style>
+          <a:lnRef idx="2">
+            <a:schemeClr val="accent1">
+              <a:lumMod val="75000"/>
+            </a:schemeClr>
+          </a:lnRef>
+          <a:fillRef idx="1">
+            <a:schemeClr val="accent1"/>
+          </a:fillRef>
+          <a:effectRef idx="0">
+            <a:srgbClr val="FFFFFF"/>
+          </a:effectRef>
+          <a:fontRef idx="minor">
+            <a:schemeClr val="lt1"/>
+          </a:fontRef>
+        </p:style>
+        <p:txBody>
+          <a:bodyPr rtlCol="0" anchor="ctr"/>
+          <a:p>
+            <a:pPr algn="ctr"/>
+            <a:endParaRPr lang="zh-CN" altLang="en-US"/>
+          </a:p>
+        </p:txBody>
+      </p:sp>
+      <p:sp>
+        <p:nvSpPr>
+          <p:cNvPr id="17" name="椭圆 16"/>
+          <p:cNvSpPr/>
+          <p:nvPr userDrawn="1"/>
+        </p:nvSpPr>
+        <p:spPr>
+          <a:xfrm>
+            <a:off x="5201920" y="4321175"/>
+            <a:ext cx="518160" cy="459740"/>
+          </a:xfrm>
+          <a:prstGeom prst="ellipse">
+            <a:avLst/>
+          </a:prstGeom>
+          <a:solidFill>
+            <a:schemeClr val="accent1"/>
+          </a:solidFill>
+        </p:spPr>
+        <p:style>
+          <a:lnRef idx="2">
+            <a:schemeClr val="accent1">
+              <a:lumMod val="75000"/>
+            </a:schemeClr>
+          </a:lnRef>
+          <a:fillRef idx="1">
+            <a:schemeClr val="accent1"/>
+          </a:fillRef>
+          <a:effectRef idx="0">
+            <a:srgbClr val="FFFFFF"/>
+          </a:effectRef>
+          <a:fontRef idx="minor">
+            <a:schemeClr val="lt1"/>
+          </a:fontRef>
+        </p:style>
+        <p:txBody>
+          <a:bodyPr rtlCol="0" anchor="ctr"/>
+          <a:p>
+            <a:pPr algn="ctr"/>
+            <a:endParaRPr lang="zh-CN" altLang="en-US"/>
+          </a:p>
+        </p:txBody>
+      </p:sp>
+      <p:sp>
+        <p:nvSpPr>
+          <p:cNvPr id="7" name="圆角矩形 6"/>
+          <p:cNvSpPr/>
+          <p:nvPr userDrawn="1"/>
+        </p:nvSpPr>
+        <p:spPr>
+          <a:xfrm>
+            <a:off x="4859020" y="2770505"/>
+            <a:ext cx="6748780" cy="977265"/>
+          </a:xfrm>
+          <a:prstGeom prst="roundRect">
+            <a:avLst/>
+          </a:prstGeom>
+          <a:solidFill>
+            <a:schemeClr val="bg1">
+              <a:alpha val="80000"/>
+            </a:schemeClr>
+          </a:solidFill>
+          <a:ln>
+            <a:gradFill>
+              <a:gsLst>
+                <a:gs pos="0">
+                  <a:schemeClr val="accent1">
+                    <a:lumMod val="5000"/>
+                    <a:lumOff val="95000"/>
+                  </a:schemeClr>
+                </a:gs>
+                <a:gs pos="74000">
+                  <a:schemeClr val="accent1">
+                    <a:lumMod val="45000"/>
+                    <a:lumOff val="55000"/>
+                  </a:schemeClr>
+                </a:gs>
+                <a:gs pos="83000">
+                  <a:schemeClr val="accent1">
+                    <a:lumMod val="45000"/>
+                    <a:lumOff val="55000"/>
+                  </a:schemeClr>
+                </a:gs>
+                <a:gs pos="100000">
+                  <a:schemeClr val="accent1">
+                    <a:lumMod val="30000"/>
+                    <a:lumOff val="70000"/>
+                  </a:schemeClr>
+                </a:gs>
+              </a:gsLst>
+              <a:lin ang="5400000" scaled="1"/>
+            </a:gradFill>
+          </a:ln>
+        </p:spPr>
+        <p:style>
+          <a:lnRef idx="2">
+            <a:schemeClr val="accent1">
+              <a:lumMod val="75000"/>
+            </a:schemeClr>
+          </a:lnRef>
+          <a:fillRef idx="1">
+            <a:schemeClr val="accent1"/>
+          </a:fillRef>
+          <a:effectRef idx="0">
+            <a:srgbClr val="FFFFFF"/>
+          </a:effectRef>
+          <a:fontRef idx="minor">
+            <a:schemeClr val="lt1"/>
+          </a:fontRef>
+        </p:style>
+        <p:txBody>
+          <a:bodyPr rtlCol="0" anchor="ctr"/>
+          <a:p>
+            <a:pPr algn="ctr"/>
+            <a:endParaRPr lang="zh-CN" altLang="en-US"/>
+          </a:p>
+        </p:txBody>
+      </p:sp>
+      <p:sp>
+        <p:nvSpPr>
+          <p:cNvPr id="18" name="椭圆 17"/>
+          <p:cNvSpPr/>
+          <p:nvPr userDrawn="1"/>
+        </p:nvSpPr>
+        <p:spPr>
+          <a:xfrm>
+            <a:off x="5201920" y="3059430"/>
+            <a:ext cx="518160" cy="459740"/>
+          </a:xfrm>
+          <a:prstGeom prst="ellipse">
+            <a:avLst/>
+          </a:prstGeom>
+          <a:solidFill>
+            <a:schemeClr val="accent1"/>
+          </a:solidFill>
+        </p:spPr>
+        <p:style>
+          <a:lnRef idx="2">
+            <a:schemeClr val="accent1">
+              <a:lumMod val="75000"/>
+            </a:schemeClr>
+          </a:lnRef>
+          <a:fillRef idx="1">
+            <a:schemeClr val="accent1"/>
+          </a:fillRef>
+          <a:effectRef idx="0">
+            <a:srgbClr val="FFFFFF"/>
+          </a:effectRef>
+          <a:fontRef idx="minor">
+            <a:schemeClr val="lt1"/>
+          </a:fontRef>
+        </p:style>
+        <p:txBody>
+          <a:bodyPr rtlCol="0" anchor="ctr"/>
+          <a:p>
+            <a:pPr algn="ctr"/>
+            <a:endParaRPr lang="zh-CN" altLang="en-US"/>
+          </a:p>
+        </p:txBody>
+      </p:sp>
+      <p:sp>
+        <p:nvSpPr>
+          <p:cNvPr id="6" name="圆角矩形 5"/>
+          <p:cNvSpPr/>
+          <p:nvPr userDrawn="1"/>
+        </p:nvSpPr>
+        <p:spPr>
+          <a:xfrm>
+            <a:off x="4859020" y="1498600"/>
+            <a:ext cx="6748780" cy="977265"/>
+          </a:xfrm>
+          <a:prstGeom prst="roundRect">
+            <a:avLst/>
+          </a:prstGeom>
+          <a:solidFill>
+            <a:schemeClr val="bg1">
+              <a:alpha val="80000"/>
+            </a:schemeClr>
+          </a:solidFill>
+          <a:ln>
+            <a:gradFill>
+              <a:gsLst>
+                <a:gs pos="0">
+                  <a:schemeClr val="accent1">
+                    <a:lumMod val="5000"/>
+                    <a:lumOff val="95000"/>
+                  </a:schemeClr>
+                </a:gs>
+                <a:gs pos="74000">
+                  <a:schemeClr val="accent1">
+                    <a:lumMod val="45000"/>
+                    <a:lumOff val="55000"/>
+                  </a:schemeClr>
+                </a:gs>
+                <a:gs pos="83000">
+                  <a:schemeClr val="accent1">
+                    <a:lumMod val="45000"/>
+                    <a:lumOff val="55000"/>
+                  </a:schemeClr>
+                </a:gs>
+                <a:gs pos="100000">
+                  <a:schemeClr val="accent1">
+                    <a:lumMod val="30000"/>
+                    <a:lumOff val="70000"/>
+                  </a:schemeClr>
+                </a:gs>
+              </a:gsLst>
+              <a:lin ang="5400000" scaled="1"/>
+            </a:gradFill>
+          </a:ln>
+        </p:spPr>
+        <p:style>
+          <a:lnRef idx="2">
+            <a:schemeClr val="accent1">
+              <a:lumMod val="75000"/>
+            </a:schemeClr>
+          </a:lnRef>
+          <a:fillRef idx="1">
+            <a:schemeClr val="accent1"/>
+          </a:fillRef>
+          <a:effectRef idx="0">
+            <a:srgbClr val="FFFFFF"/>
+          </a:effectRef>
+          <a:fontRef idx="minor">
+            <a:schemeClr val="lt1"/>
+          </a:fontRef>
+        </p:style>
+        <p:txBody>
+          <a:bodyPr rtlCol="0" anchor="ctr"/>
+          <a:p>
+            <a:pPr algn="ctr"/>
+            <a:endParaRPr lang="zh-CN" altLang="en-US"/>
+          </a:p>
+        </p:txBody>
+      </p:sp>
+      <p:sp>
+        <p:nvSpPr>
+          <p:cNvPr id="9" name="椭圆 8"/>
+          <p:cNvSpPr/>
+          <p:nvPr userDrawn="1"/>
+        </p:nvSpPr>
+        <p:spPr>
+          <a:xfrm>
+            <a:off x="5201920" y="1797685"/>
+            <a:ext cx="518160" cy="459740"/>
+          </a:xfrm>
+          <a:prstGeom prst="ellipse">
+            <a:avLst/>
+          </a:prstGeom>
+          <a:solidFill>
+            <a:schemeClr val="accent1"/>
+          </a:solidFill>
+        </p:spPr>
+        <p:style>
+          <a:lnRef idx="2">
+            <a:schemeClr val="accent1">
+              <a:lumMod val="75000"/>
+            </a:schemeClr>
+          </a:lnRef>
+          <a:fillRef idx="1">
+            <a:schemeClr val="accent1"/>
+          </a:fillRef>
+          <a:effectRef idx="0">
+            <a:srgbClr val="FFFFFF"/>
+          </a:effectRef>
+          <a:fontRef idx="minor">
+            <a:schemeClr val="lt1"/>
+          </a:fontRef>
+        </p:style>
+        <p:txBody>
+          <a:bodyPr rtlCol="0" anchor="ctr"/>
+          <a:p>
+            <a:pPr algn="ctr"/>
+            <a:endParaRPr lang="zh-CN" altLang="en-US"/>
+          </a:p>
+        </p:txBody>
+      </p:sp>
+      <p:sp>
+        <p:nvSpPr>
           <p:cNvPr id="2" name="标题 1"/>
           <p:cNvSpPr>
             <a:spLocks noGrp="1"/>
@@ -2926,23 +3944,291 @@
       </p:sp>
       <p:sp>
         <p:nvSpPr>
-          <p:cNvPr id="6" name="圆角矩形 5"/>
+          <p:cNvPr id="10" name="内容占位符 9"/>
+          <p:cNvSpPr>
+            <a:spLocks noGrp="1"/>
+          </p:cNvSpPr>
+          <p:nvPr>
+            <p:ph idx="13" hasCustomPrompt="1"/>
+          </p:nvPr>
+        </p:nvSpPr>
+        <p:spPr>
+          <a:xfrm>
+            <a:off x="5223510" y="1774825"/>
+            <a:ext cx="568960" cy="525780"/>
+          </a:xfrm>
+        </p:spPr>
+        <p:txBody>
+          <a:bodyPr/>
+          <a:lstStyle>
+            <a:lvl1pPr>
+              <a:defRPr b="1">
+                <a:solidFill>
+                  <a:schemeClr val="bg1"/>
+                </a:solidFill>
+              </a:defRPr>
+            </a:lvl1pPr>
+          </a:lstStyle>
+          <a:p>
+            <a:pPr lvl="0"/>
+            <a:r>
+              <a:rPr lang="en-US" altLang="zh-CN" smtClean="0"/>
+              <a:t>01</a:t>
+            </a:r>
+            <a:endParaRPr lang="en-US" altLang="zh-CN" smtClean="0"/>
+          </a:p>
+        </p:txBody>
+      </p:sp>
+      <p:sp>
+        <p:nvSpPr>
+          <p:cNvPr id="11" name="内容占位符 10"/>
+          <p:cNvSpPr>
+            <a:spLocks noGrp="1"/>
+          </p:cNvSpPr>
+          <p:nvPr>
+            <p:ph idx="14" hasCustomPrompt="1"/>
+          </p:nvPr>
+        </p:nvSpPr>
+        <p:spPr>
+          <a:xfrm>
+            <a:off x="5224145" y="3036570"/>
+            <a:ext cx="568325" cy="445135"/>
+          </a:xfrm>
+        </p:spPr>
+        <p:txBody>
+          <a:bodyPr/>
+          <a:lstStyle>
+            <a:lvl1pPr>
+              <a:defRPr b="1">
+                <a:solidFill>
+                  <a:schemeClr val="bg1"/>
+                </a:solidFill>
+              </a:defRPr>
+            </a:lvl1pPr>
+          </a:lstStyle>
+          <a:p>
+            <a:pPr lvl="0"/>
+            <a:r>
+              <a:rPr lang="en-US" altLang="zh-CN" smtClean="0"/>
+              <a:t>02</a:t>
+            </a:r>
+            <a:endParaRPr lang="en-US" altLang="zh-CN" smtClean="0"/>
+          </a:p>
+        </p:txBody>
+      </p:sp>
+      <p:sp>
+        <p:nvSpPr>
+          <p:cNvPr id="12" name="内容占位符 11"/>
+          <p:cNvSpPr>
+            <a:spLocks noGrp="1"/>
+          </p:cNvSpPr>
+          <p:nvPr>
+            <p:ph idx="15" hasCustomPrompt="1"/>
+          </p:nvPr>
+        </p:nvSpPr>
+        <p:spPr>
+          <a:xfrm>
+            <a:off x="5224145" y="4277995"/>
+            <a:ext cx="546735" cy="503555"/>
+          </a:xfrm>
+        </p:spPr>
+        <p:txBody>
+          <a:bodyPr/>
+          <a:lstStyle>
+            <a:lvl1pPr>
+              <a:defRPr b="1">
+                <a:solidFill>
+                  <a:schemeClr val="bg1"/>
+                </a:solidFill>
+              </a:defRPr>
+            </a:lvl1pPr>
+          </a:lstStyle>
+          <a:p>
+            <a:pPr lvl="0"/>
+            <a:r>
+              <a:rPr lang="en-US" altLang="zh-CN" smtClean="0"/>
+              <a:t>03</a:t>
+            </a:r>
+            <a:endParaRPr lang="en-US" altLang="zh-CN" smtClean="0"/>
+          </a:p>
+        </p:txBody>
+      </p:sp>
+      <p:sp>
+        <p:nvSpPr>
+          <p:cNvPr id="13" name="内容占位符 12"/>
+          <p:cNvSpPr>
+            <a:spLocks noGrp="1"/>
+          </p:cNvSpPr>
+          <p:nvPr>
+            <p:ph idx="16" hasCustomPrompt="1"/>
+          </p:nvPr>
+        </p:nvSpPr>
+        <p:spPr>
+          <a:xfrm>
+            <a:off x="6092190" y="1629410"/>
+            <a:ext cx="5026660" cy="659130"/>
+          </a:xfrm>
+        </p:spPr>
+        <p:txBody>
+          <a:bodyPr/>
+          <a:lstStyle>
+            <a:lvl1pPr>
+              <a:defRPr b="0" i="0">
+                <a:solidFill>
+                  <a:schemeClr val="accent1"/>
+                </a:solidFill>
+                <a:effectLst>
+                  <a:outerShdw blurRad="38100" dist="25400" dir="5400000" algn="ctr" rotWithShape="0">
+                    <a:srgbClr val="6E747A">
+                      <a:alpha val="43000"/>
+                    </a:srgbClr>
+                  </a:outerShdw>
+                </a:effectLst>
+              </a:defRPr>
+            </a:lvl1pPr>
+          </a:lstStyle>
+          <a:p>
+            <a:pPr lvl="0"/>
+            <a:endParaRPr lang="zh-CN" altLang="en-US" smtClean="0"/>
+          </a:p>
+        </p:txBody>
+      </p:sp>
+      <p:sp>
+        <p:nvSpPr>
+          <p:cNvPr id="14" name="内容占位符 13"/>
+          <p:cNvSpPr>
+            <a:spLocks noGrp="1"/>
+          </p:cNvSpPr>
+          <p:nvPr>
+            <p:ph idx="17" hasCustomPrompt="1"/>
+          </p:nvPr>
+        </p:nvSpPr>
+        <p:spPr>
+          <a:xfrm>
+            <a:off x="6092190" y="2829560"/>
+            <a:ext cx="5026660" cy="687705"/>
+          </a:xfrm>
+        </p:spPr>
+        <p:txBody>
+          <a:bodyPr>
+            <a:scene3d>
+              <a:camera prst="orthographicFront"/>
+              <a:lightRig rig="threePt" dir="t"/>
+            </a:scene3d>
+          </a:bodyPr>
+          <a:lstStyle>
+            <a:lvl1pPr>
+              <a:defRPr>
+                <a:solidFill>
+                  <a:schemeClr val="accent1"/>
+                </a:solidFill>
+                <a:effectLst>
+                  <a:outerShdw blurRad="38100" dist="25400" dir="5400000" algn="ctr" rotWithShape="0">
+                    <a:srgbClr val="6E747A">
+                      <a:alpha val="43000"/>
+                    </a:srgbClr>
+                  </a:outerShdw>
+                </a:effectLst>
+              </a:defRPr>
+            </a:lvl1pPr>
+          </a:lstStyle>
+          <a:p>
+            <a:pPr lvl="0"/>
+            <a:endParaRPr lang="zh-CN" altLang="en-US" smtClean="0"/>
+          </a:p>
+        </p:txBody>
+      </p:sp>
+      <p:sp>
+        <p:nvSpPr>
+          <p:cNvPr id="16" name="内容占位符 15"/>
+          <p:cNvSpPr>
+            <a:spLocks noGrp="1"/>
+          </p:cNvSpPr>
+          <p:nvPr>
+            <p:ph idx="18" hasCustomPrompt="1"/>
+          </p:nvPr>
+        </p:nvSpPr>
+        <p:spPr>
+          <a:xfrm>
+            <a:off x="6092190" y="4138930"/>
+            <a:ext cx="5026660" cy="650875"/>
+          </a:xfrm>
+        </p:spPr>
+        <p:txBody>
+          <a:bodyPr>
+            <a:scene3d>
+              <a:camera prst="orthographicFront"/>
+              <a:lightRig rig="threePt" dir="t"/>
+            </a:scene3d>
+          </a:bodyPr>
+          <a:lstStyle>
+            <a:lvl1pPr>
+              <a:defRPr>
+                <a:solidFill>
+                  <a:schemeClr val="accent1"/>
+                </a:solidFill>
+                <a:effectLst>
+                  <a:outerShdw blurRad="38100" dist="25400" dir="5400000" algn="ctr" rotWithShape="0">
+                    <a:srgbClr val="6E747A">
+                      <a:alpha val="43000"/>
+                    </a:srgbClr>
+                  </a:outerShdw>
+                </a:effectLst>
+              </a:defRPr>
+            </a:lvl1pPr>
+          </a:lstStyle>
+          <a:p>
+            <a:pPr lvl="0"/>
+            <a:endParaRPr lang="zh-CN" altLang="en-US" smtClean="0"/>
+          </a:p>
+        </p:txBody>
+      </p:sp>
+      <p:pic>
+        <p:nvPicPr>
+          <p:cNvPr id="19" name="图片 18" descr="PPT页面美化建议"/>
+          <p:cNvPicPr>
+            <a:picLocks noChangeAspect="1"/>
+          </p:cNvPicPr>
+          <p:nvPr userDrawn="1"/>
+        </p:nvPicPr>
+        <p:blipFill>
+          <a:blip r:embed="rId3"/>
+          <a:stretch>
+            <a:fillRect/>
+          </a:stretch>
+        </p:blipFill>
+        <p:spPr>
+          <a:xfrm>
+            <a:off x="540385" y="1449070"/>
+            <a:ext cx="3738245" cy="3738245"/>
+          </a:xfrm>
+          <a:prstGeom prst="rect">
+            <a:avLst/>
+          </a:prstGeom>
+        </p:spPr>
+      </p:pic>
+      <p:sp>
+        <p:nvSpPr>
+          <p:cNvPr id="20" name="矩形 19"/>
           <p:cNvSpPr/>
           <p:nvPr userDrawn="1"/>
         </p:nvSpPr>
         <p:spPr>
           <a:xfrm>
-            <a:off x="4859020" y="1498600"/>
-            <a:ext cx="6748780" cy="977265"/>
-          </a:xfrm>
-          <a:prstGeom prst="roundRect">
+            <a:off x="3564890" y="4871085"/>
+            <a:ext cx="655320" cy="272415"/>
+          </a:xfrm>
+          <a:prstGeom prst="rect">
             <a:avLst/>
           </a:prstGeom>
           <a:solidFill>
-            <a:schemeClr val="bg1">
-              <a:alpha val="80000"/>
-            </a:schemeClr>
+            <a:schemeClr val="bg1"/>
           </a:solidFill>
+          <a:ln>
+            <a:solidFill>
+              <a:schemeClr val="bg1"/>
+            </a:solidFill>
+          </a:ln>
         </p:spPr>
         <p:style>
           <a:lnRef idx="2">
@@ -2965,277 +4251,6 @@
           <a:p>
             <a:pPr algn="ctr"/>
             <a:endParaRPr lang="zh-CN" altLang="en-US"/>
-          </a:p>
-        </p:txBody>
-      </p:sp>
-      <p:sp>
-        <p:nvSpPr>
-          <p:cNvPr id="7" name="圆角矩形 6"/>
-          <p:cNvSpPr/>
-          <p:nvPr userDrawn="1"/>
-        </p:nvSpPr>
-        <p:spPr>
-          <a:xfrm>
-            <a:off x="4859020" y="2770505"/>
-            <a:ext cx="6748780" cy="977265"/>
-          </a:xfrm>
-          <a:prstGeom prst="roundRect">
-            <a:avLst/>
-          </a:prstGeom>
-          <a:solidFill>
-            <a:schemeClr val="bg1">
-              <a:alpha val="80000"/>
-            </a:schemeClr>
-          </a:solidFill>
-        </p:spPr>
-        <p:style>
-          <a:lnRef idx="2">
-            <a:schemeClr val="accent1">
-              <a:lumMod val="75000"/>
-            </a:schemeClr>
-          </a:lnRef>
-          <a:fillRef idx="1">
-            <a:schemeClr val="accent1"/>
-          </a:fillRef>
-          <a:effectRef idx="0">
-            <a:srgbClr val="FFFFFF"/>
-          </a:effectRef>
-          <a:fontRef idx="minor">
-            <a:schemeClr val="lt1"/>
-          </a:fontRef>
-        </p:style>
-        <p:txBody>
-          <a:bodyPr rtlCol="0" anchor="ctr"/>
-          <a:p>
-            <a:pPr algn="ctr"/>
-            <a:endParaRPr lang="zh-CN" altLang="en-US"/>
-          </a:p>
-        </p:txBody>
-      </p:sp>
-      <p:sp>
-        <p:nvSpPr>
-          <p:cNvPr id="8" name="圆角矩形 7"/>
-          <p:cNvSpPr/>
-          <p:nvPr userDrawn="1"/>
-        </p:nvSpPr>
-        <p:spPr>
-          <a:xfrm>
-            <a:off x="4859020" y="4042410"/>
-            <a:ext cx="6748780" cy="977265"/>
-          </a:xfrm>
-          <a:prstGeom prst="roundRect">
-            <a:avLst/>
-          </a:prstGeom>
-          <a:solidFill>
-            <a:schemeClr val="bg1">
-              <a:alpha val="80000"/>
-            </a:schemeClr>
-          </a:solidFill>
-        </p:spPr>
-        <p:style>
-          <a:lnRef idx="2">
-            <a:schemeClr val="accent1">
-              <a:lumMod val="75000"/>
-            </a:schemeClr>
-          </a:lnRef>
-          <a:fillRef idx="1">
-            <a:schemeClr val="accent1"/>
-          </a:fillRef>
-          <a:effectRef idx="0">
-            <a:srgbClr val="FFFFFF"/>
-          </a:effectRef>
-          <a:fontRef idx="minor">
-            <a:schemeClr val="lt1"/>
-          </a:fontRef>
-        </p:style>
-        <p:txBody>
-          <a:bodyPr rtlCol="0" anchor="ctr"/>
-          <a:p>
-            <a:pPr algn="ctr"/>
-            <a:endParaRPr lang="zh-CN" altLang="en-US"/>
-          </a:p>
-        </p:txBody>
-      </p:sp>
-      <p:sp>
-        <p:nvSpPr>
-          <p:cNvPr id="10" name="内容占位符 9"/>
-          <p:cNvSpPr>
-            <a:spLocks noGrp="1"/>
-          </p:cNvSpPr>
-          <p:nvPr>
-            <p:ph idx="13" hasCustomPrompt="1"/>
-          </p:nvPr>
-        </p:nvSpPr>
-        <p:spPr>
-          <a:xfrm>
-            <a:off x="5245735" y="1775460"/>
-            <a:ext cx="568960" cy="525780"/>
-          </a:xfrm>
-        </p:spPr>
-        <p:txBody>
-          <a:bodyPr/>
-          <a:lstStyle>
-            <a:lvl1pPr>
-              <a:defRPr b="1">
-                <a:solidFill>
-                  <a:schemeClr val="accent1"/>
-                </a:solidFill>
-              </a:defRPr>
-            </a:lvl1pPr>
-          </a:lstStyle>
-          <a:p>
-            <a:pPr lvl="0"/>
-            <a:r>
-              <a:rPr lang="en-US" altLang="zh-CN" smtClean="0"/>
-              <a:t>01</a:t>
-            </a:r>
-            <a:endParaRPr lang="en-US" altLang="zh-CN" smtClean="0"/>
-          </a:p>
-        </p:txBody>
-      </p:sp>
-      <p:sp>
-        <p:nvSpPr>
-          <p:cNvPr id="11" name="内容占位符 10"/>
-          <p:cNvSpPr>
-            <a:spLocks noGrp="1"/>
-          </p:cNvSpPr>
-          <p:nvPr>
-            <p:ph idx="14" hasCustomPrompt="1"/>
-          </p:nvPr>
-        </p:nvSpPr>
-        <p:spPr>
-          <a:xfrm>
-            <a:off x="5245735" y="3067050"/>
-            <a:ext cx="568325" cy="445135"/>
-          </a:xfrm>
-        </p:spPr>
-        <p:txBody>
-          <a:bodyPr/>
-          <a:lstStyle>
-            <a:lvl1pPr>
-              <a:defRPr b="1">
-                <a:solidFill>
-                  <a:schemeClr val="accent1"/>
-                </a:solidFill>
-              </a:defRPr>
-            </a:lvl1pPr>
-          </a:lstStyle>
-          <a:p>
-            <a:pPr lvl="0"/>
-            <a:r>
-              <a:rPr lang="en-US" altLang="zh-CN" smtClean="0"/>
-              <a:t>02</a:t>
-            </a:r>
-            <a:endParaRPr lang="en-US" altLang="zh-CN" smtClean="0"/>
-          </a:p>
-        </p:txBody>
-      </p:sp>
-      <p:sp>
-        <p:nvSpPr>
-          <p:cNvPr id="12" name="内容占位符 11"/>
-          <p:cNvSpPr>
-            <a:spLocks noGrp="1"/>
-          </p:cNvSpPr>
-          <p:nvPr>
-            <p:ph idx="15" hasCustomPrompt="1"/>
-          </p:nvPr>
-        </p:nvSpPr>
-        <p:spPr>
-          <a:xfrm>
-            <a:off x="5245735" y="4277995"/>
-            <a:ext cx="546735" cy="503555"/>
-          </a:xfrm>
-        </p:spPr>
-        <p:txBody>
-          <a:bodyPr/>
-          <a:lstStyle>
-            <a:lvl1pPr>
-              <a:defRPr b="1">
-                <a:solidFill>
-                  <a:schemeClr val="accent1"/>
-                </a:solidFill>
-              </a:defRPr>
-            </a:lvl1pPr>
-          </a:lstStyle>
-          <a:p>
-            <a:pPr lvl="0"/>
-            <a:r>
-              <a:rPr lang="en-US" altLang="zh-CN" smtClean="0"/>
-              <a:t>03</a:t>
-            </a:r>
-            <a:endParaRPr lang="en-US" altLang="zh-CN" smtClean="0"/>
-          </a:p>
-        </p:txBody>
-      </p:sp>
-      <p:sp>
-        <p:nvSpPr>
-          <p:cNvPr id="13" name="内容占位符 12"/>
-          <p:cNvSpPr>
-            <a:spLocks noGrp="1"/>
-          </p:cNvSpPr>
-          <p:nvPr>
-            <p:ph idx="16" hasCustomPrompt="1"/>
-          </p:nvPr>
-        </p:nvSpPr>
-        <p:spPr>
-          <a:xfrm>
-            <a:off x="6092190" y="1775460"/>
-            <a:ext cx="5026660" cy="513080"/>
-          </a:xfrm>
-        </p:spPr>
-        <p:txBody>
-          <a:bodyPr/>
-          <a:p>
-            <a:pPr lvl="0"/>
-            <a:endParaRPr lang="zh-CN" altLang="en-US" smtClean="0"/>
-          </a:p>
-        </p:txBody>
-      </p:sp>
-      <p:sp>
-        <p:nvSpPr>
-          <p:cNvPr id="14" name="内容占位符 13"/>
-          <p:cNvSpPr>
-            <a:spLocks noGrp="1"/>
-          </p:cNvSpPr>
-          <p:nvPr>
-            <p:ph idx="17" hasCustomPrompt="1"/>
-          </p:nvPr>
-        </p:nvSpPr>
-        <p:spPr>
-          <a:xfrm>
-            <a:off x="6092190" y="3004185"/>
-            <a:ext cx="5026660" cy="513080"/>
-          </a:xfrm>
-        </p:spPr>
-        <p:txBody>
-          <a:bodyPr/>
-          <a:p>
-            <a:pPr lvl="0"/>
-            <a:endParaRPr lang="zh-CN" altLang="en-US" smtClean="0"/>
-          </a:p>
-        </p:txBody>
-      </p:sp>
-      <p:sp>
-        <p:nvSpPr>
-          <p:cNvPr id="16" name="内容占位符 15"/>
-          <p:cNvSpPr>
-            <a:spLocks noGrp="1"/>
-          </p:cNvSpPr>
-          <p:nvPr>
-            <p:ph idx="18" hasCustomPrompt="1"/>
-          </p:nvPr>
-        </p:nvSpPr>
-        <p:spPr>
-          <a:xfrm>
-            <a:off x="6092190" y="4276725"/>
-            <a:ext cx="5026660" cy="513080"/>
-          </a:xfrm>
-        </p:spPr>
-        <p:txBody>
-          <a:bodyPr/>
-          <a:p>
-            <a:pPr lvl="0"/>
-            <a:endParaRPr lang="zh-CN" altLang="en-US" smtClean="0"/>
           </a:p>
         </p:txBody>
       </p:sp>
@@ -3822,6 +4837,12 @@
 
 <file path=ppt/tags/tag1.xml><?xml version="1.0" encoding="utf-8"?>
 <p:tagLst xmlns:p="http://schemas.openxmlformats.org/presentationml/2006/main">
+  <p:tag name="KSO_WM_DIAGRAM_VIRTUALLY_FRAME" val="{&quot;height&quot;:343.15,&quot;left&quot;:40,&quot;top&quot;:56.85,&quot;width&quot;:885.2}"/>
+</p:tagLst>
+</file>
+
+<file path=ppt/tags/tag10.xml><?xml version="1.0" encoding="utf-8"?>
+<p:tagLst xmlns:p="http://schemas.openxmlformats.org/presentationml/2006/main">
   <p:tag name="KSO_WM_UNIT_HIGHLIGHT" val="0"/>
   <p:tag name="KSO_WM_UNIT_COMPATIBLE" val="0"/>
   <p:tag name="KSO_WM_UNIT_DIAGRAM_ISNUMVISUAL" val="0"/>
@@ -3833,42 +4854,15 @@
 </p:tagLst>
 </file>
 
-<file path=ppt/tags/tag10.xml><?xml version="1.0" encoding="utf-8"?>
-<p:tagLst xmlns:p="http://schemas.openxmlformats.org/presentationml/2006/main">
-  <p:tag name="KSO_WM_UNIT_HIGHLIGHT" val="0"/>
-  <p:tag name="KSO_WM_UNIT_COMPATIBLE" val="0"/>
-  <p:tag name="KSO_WM_UNIT_DIAGRAM_ISNUMVISUAL" val="0"/>
-  <p:tag name="KSO_WM_UNIT_DIAGRAM_ISREFERUNIT" val="0"/>
-  <p:tag name="KSO_WM_UNIT_ID" val="_11**"/>
-  <p:tag name="KSO_WM_UNIT_LAYERLEVEL" val="1"/>
-  <p:tag name="KSO_WM_TAG_VERSION" val="1.0"/>
-  <p:tag name="KSO_WM_BEAUTIFY_FLAG" val="#wm#"/>
-</p:tagLst>
-</file>
-
 <file path=ppt/tags/tag11.xml><?xml version="1.0" encoding="utf-8"?>
 <p:tagLst xmlns:p="http://schemas.openxmlformats.org/presentationml/2006/main">
-  <p:tag name="KSO_WM_UNIT_HIGHLIGHT" val="0"/>
-  <p:tag name="KSO_WM_UNIT_COMPATIBLE" val="0"/>
-  <p:tag name="KSO_WM_UNIT_DIAGRAM_ISNUMVISUAL" val="0"/>
-  <p:tag name="KSO_WM_UNIT_DIAGRAM_ISREFERUNIT" val="0"/>
-  <p:tag name="KSO_WM_UNIT_ID" val="_11**"/>
-  <p:tag name="KSO_WM_UNIT_LAYERLEVEL" val="1"/>
-  <p:tag name="KSO_WM_TAG_VERSION" val="1.0"/>
-  <p:tag name="KSO_WM_BEAUTIFY_FLAG" val="#wm#"/>
+  <p:tag name="KSO_WM_DIAGRAM_VIRTUALLY_FRAME" val="{&quot;height&quot;:343.15,&quot;left&quot;:40,&quot;top&quot;:56.85,&quot;width&quot;:885.2}"/>
 </p:tagLst>
 </file>
 
 <file path=ppt/tags/tag12.xml><?xml version="1.0" encoding="utf-8"?>
 <p:tagLst xmlns:p="http://schemas.openxmlformats.org/presentationml/2006/main">
-  <p:tag name="KSO_WM_UNIT_HIGHLIGHT" val="0"/>
-  <p:tag name="KSO_WM_UNIT_COMPATIBLE" val="0"/>
-  <p:tag name="KSO_WM_UNIT_DIAGRAM_ISNUMVISUAL" val="0"/>
-  <p:tag name="KSO_WM_UNIT_DIAGRAM_ISREFERUNIT" val="0"/>
-  <p:tag name="KSO_WM_UNIT_ID" val="_11**"/>
-  <p:tag name="KSO_WM_UNIT_LAYERLEVEL" val="1"/>
-  <p:tag name="KSO_WM_TAG_VERSION" val="1.0"/>
-  <p:tag name="KSO_WM_BEAUTIFY_FLAG" val="#wm#"/>
+  <p:tag name="KSO_WM_DIAGRAM_VIRTUALLY_FRAME" val="{&quot;height&quot;:365.05,&quot;left&quot;:40,&quot;top&quot;:34.95,&quot;width&quot;:885.2}"/>
 </p:tagLst>
 </file>
 
@@ -3891,12 +4885,10 @@
   <p:tag name="KSO_WM_UNIT_COMPATIBLE" val="0"/>
   <p:tag name="KSO_WM_UNIT_DIAGRAM_ISNUMVISUAL" val="0"/>
   <p:tag name="KSO_WM_UNIT_DIAGRAM_ISREFERUNIT" val="0"/>
-  <p:tag name="KSO_WM_UNIT_ID" val="_0**"/>
+  <p:tag name="KSO_WM_UNIT_ID" val="_11**"/>
   <p:tag name="KSO_WM_UNIT_LAYERLEVEL" val="1"/>
   <p:tag name="KSO_WM_TAG_VERSION" val="1.0"/>
   <p:tag name="KSO_WM_BEAUTIFY_FLAG" val="#wm#"/>
-  <p:tag name="KSO_WM_TEMPLATE_CATEGORY" val="custom"/>
-  <p:tag name="KSO_WM_TEMPLATE_INDEX" val="20205081"/>
 </p:tagLst>
 </file>
 
@@ -3906,12 +4898,10 @@
   <p:tag name="KSO_WM_UNIT_COMPATIBLE" val="0"/>
   <p:tag name="KSO_WM_UNIT_DIAGRAM_ISNUMVISUAL" val="0"/>
   <p:tag name="KSO_WM_UNIT_DIAGRAM_ISREFERUNIT" val="0"/>
-  <p:tag name="KSO_WM_UNIT_ID" val="_0**"/>
+  <p:tag name="KSO_WM_UNIT_ID" val="_11**"/>
   <p:tag name="KSO_WM_UNIT_LAYERLEVEL" val="1"/>
   <p:tag name="KSO_WM_TAG_VERSION" val="1.0"/>
   <p:tag name="KSO_WM_BEAUTIFY_FLAG" val="#wm#"/>
-  <p:tag name="KSO_WM_TEMPLATE_CATEGORY" val="custom"/>
-  <p:tag name="KSO_WM_TEMPLATE_INDEX" val="20205081"/>
 </p:tagLst>
 </file>
 
@@ -3921,7 +4911,7 @@
   <p:tag name="KSO_WM_UNIT_COMPATIBLE" val="0"/>
   <p:tag name="KSO_WM_UNIT_DIAGRAM_ISNUMVISUAL" val="0"/>
   <p:tag name="KSO_WM_UNIT_DIAGRAM_ISREFERUNIT" val="0"/>
-  <p:tag name="KSO_WM_UNIT_ID" val="_0**"/>
+  <p:tag name="KSO_WM_UNIT_ID" val="_11**"/>
   <p:tag name="KSO_WM_UNIT_LAYERLEVEL" val="1"/>
   <p:tag name="KSO_WM_TAG_VERSION" val="1.0"/>
   <p:tag name="KSO_WM_BEAUTIFY_FLAG" val="#wm#"/>
@@ -3934,7 +4924,7 @@
   <p:tag name="KSO_WM_UNIT_COMPATIBLE" val="0"/>
   <p:tag name="KSO_WM_UNIT_DIAGRAM_ISNUMVISUAL" val="0"/>
   <p:tag name="KSO_WM_UNIT_DIAGRAM_ISREFERUNIT" val="0"/>
-  <p:tag name="KSO_WM_UNIT_ID" val="_0**"/>
+  <p:tag name="KSO_WM_UNIT_ID" val="_11**"/>
   <p:tag name="KSO_WM_UNIT_LAYERLEVEL" val="1"/>
   <p:tag name="KSO_WM_TAG_VERSION" val="1.0"/>
   <p:tag name="KSO_WM_BEAUTIFY_FLAG" val="#wm#"/>
@@ -3951,10 +4941,72 @@
   <p:tag name="KSO_WM_UNIT_LAYERLEVEL" val="1"/>
   <p:tag name="KSO_WM_TAG_VERSION" val="1.0"/>
   <p:tag name="KSO_WM_BEAUTIFY_FLAG" val="#wm#"/>
+  <p:tag name="KSO_WM_TEMPLATE_CATEGORY" val="custom"/>
+  <p:tag name="KSO_WM_TEMPLATE_INDEX" val="20205081"/>
 </p:tagLst>
 </file>
 
 <file path=ppt/tags/tag19.xml><?xml version="1.0" encoding="utf-8"?>
+<p:tagLst xmlns:p="http://schemas.openxmlformats.org/presentationml/2006/main">
+  <p:tag name="KSO_WM_UNIT_HIGHLIGHT" val="0"/>
+  <p:tag name="KSO_WM_UNIT_COMPATIBLE" val="0"/>
+  <p:tag name="KSO_WM_UNIT_DIAGRAM_ISNUMVISUAL" val="0"/>
+  <p:tag name="KSO_WM_UNIT_DIAGRAM_ISREFERUNIT" val="0"/>
+  <p:tag name="KSO_WM_UNIT_ID" val="_0**"/>
+  <p:tag name="KSO_WM_UNIT_LAYERLEVEL" val="1"/>
+  <p:tag name="KSO_WM_TAG_VERSION" val="1.0"/>
+  <p:tag name="KSO_WM_BEAUTIFY_FLAG" val="#wm#"/>
+  <p:tag name="KSO_WM_TEMPLATE_CATEGORY" val="custom"/>
+  <p:tag name="KSO_WM_TEMPLATE_INDEX" val="20205081"/>
+</p:tagLst>
+</file>
+
+<file path=ppt/tags/tag2.xml><?xml version="1.0" encoding="utf-8"?>
+<p:tagLst xmlns:p="http://schemas.openxmlformats.org/presentationml/2006/main">
+  <p:tag name="KSO_WM_DIAGRAM_VIRTUALLY_FRAME" val="{&quot;height&quot;:343.15,&quot;left&quot;:40,&quot;top&quot;:56.85,&quot;width&quot;:885.2}"/>
+</p:tagLst>
+</file>
+
+<file path=ppt/tags/tag20.xml><?xml version="1.0" encoding="utf-8"?>
+<p:tagLst xmlns:p="http://schemas.openxmlformats.org/presentationml/2006/main">
+  <p:tag name="KSO_WM_UNIT_HIGHLIGHT" val="0"/>
+  <p:tag name="KSO_WM_UNIT_COMPATIBLE" val="0"/>
+  <p:tag name="KSO_WM_UNIT_DIAGRAM_ISNUMVISUAL" val="0"/>
+  <p:tag name="KSO_WM_UNIT_DIAGRAM_ISREFERUNIT" val="0"/>
+  <p:tag name="KSO_WM_UNIT_ID" val="_0**"/>
+  <p:tag name="KSO_WM_UNIT_LAYERLEVEL" val="1"/>
+  <p:tag name="KSO_WM_TAG_VERSION" val="1.0"/>
+  <p:tag name="KSO_WM_BEAUTIFY_FLAG" val="#wm#"/>
+</p:tagLst>
+</file>
+
+<file path=ppt/tags/tag21.xml><?xml version="1.0" encoding="utf-8"?>
+<p:tagLst xmlns:p="http://schemas.openxmlformats.org/presentationml/2006/main">
+  <p:tag name="KSO_WM_UNIT_HIGHLIGHT" val="0"/>
+  <p:tag name="KSO_WM_UNIT_COMPATIBLE" val="0"/>
+  <p:tag name="KSO_WM_UNIT_DIAGRAM_ISNUMVISUAL" val="0"/>
+  <p:tag name="KSO_WM_UNIT_DIAGRAM_ISREFERUNIT" val="0"/>
+  <p:tag name="KSO_WM_UNIT_ID" val="_0**"/>
+  <p:tag name="KSO_WM_UNIT_LAYERLEVEL" val="1"/>
+  <p:tag name="KSO_WM_TAG_VERSION" val="1.0"/>
+  <p:tag name="KSO_WM_BEAUTIFY_FLAG" val="#wm#"/>
+</p:tagLst>
+</file>
+
+<file path=ppt/tags/tag22.xml><?xml version="1.0" encoding="utf-8"?>
+<p:tagLst xmlns:p="http://schemas.openxmlformats.org/presentationml/2006/main">
+  <p:tag name="KSO_WM_UNIT_HIGHLIGHT" val="0"/>
+  <p:tag name="KSO_WM_UNIT_COMPATIBLE" val="0"/>
+  <p:tag name="KSO_WM_UNIT_DIAGRAM_ISNUMVISUAL" val="0"/>
+  <p:tag name="KSO_WM_UNIT_DIAGRAM_ISREFERUNIT" val="0"/>
+  <p:tag name="KSO_WM_UNIT_ID" val="_0**"/>
+  <p:tag name="KSO_WM_UNIT_LAYERLEVEL" val="1"/>
+  <p:tag name="KSO_WM_TAG_VERSION" val="1.0"/>
+  <p:tag name="KSO_WM_BEAUTIFY_FLAG" val="#wm#"/>
+</p:tagLst>
+</file>
+
+<file path=ppt/tags/tag23.xml><?xml version="1.0" encoding="utf-8"?>
 <p:tagLst xmlns:p="http://schemas.openxmlformats.org/presentationml/2006/main">
   <p:tag name="KSO_WM_TEMPLATE_THUMBS_INDEX" val="1、4、7、12、13、14、15、16、17、18、20、24、25、28、33、36、40、43、44"/>
   <p:tag name="KSO_WM_TEMPLATE_SUBCATEGORY" val="19"/>
@@ -3965,19 +5017,6 @@
   <p:tag name="KSO_WM_TEMPLATE_MASTER_TYPE" val="0"/>
   <p:tag name="KSO_WM_TEMPLATE_COLOR_TYPE" val="1"/>
   <p:tag name="KSO_WM_UNIT_SHOW_EDIT_AREA_INDICATION" val="1"/>
-</p:tagLst>
-</file>
-
-<file path=ppt/tags/tag2.xml><?xml version="1.0" encoding="utf-8"?>
-<p:tagLst xmlns:p="http://schemas.openxmlformats.org/presentationml/2006/main">
-  <p:tag name="KSO_WM_UNIT_HIGHLIGHT" val="0"/>
-  <p:tag name="KSO_WM_UNIT_COMPATIBLE" val="0"/>
-  <p:tag name="KSO_WM_UNIT_DIAGRAM_ISNUMVISUAL" val="0"/>
-  <p:tag name="KSO_WM_UNIT_DIAGRAM_ISREFERUNIT" val="0"/>
-  <p:tag name="KSO_WM_UNIT_ID" val="_5**"/>
-  <p:tag name="KSO_WM_UNIT_LAYERLEVEL" val="1"/>
-  <p:tag name="KSO_WM_TAG_VERSION" val="1.0"/>
-  <p:tag name="KSO_WM_BEAUTIFY_FLAG" val="#wm#"/>
 </p:tagLst>
 </file>
 
@@ -4065,7 +5104,7 @@
   <p:tag name="KSO_WM_UNIT_COMPATIBLE" val="0"/>
   <p:tag name="KSO_WM_UNIT_DIAGRAM_ISNUMVISUAL" val="0"/>
   <p:tag name="KSO_WM_UNIT_DIAGRAM_ISREFERUNIT" val="0"/>
-  <p:tag name="KSO_WM_UNIT_ID" val="_11**"/>
+  <p:tag name="KSO_WM_UNIT_ID" val="_5**"/>
   <p:tag name="KSO_WM_UNIT_LAYERLEVEL" val="1"/>
   <p:tag name="KSO_WM_TAG_VERSION" val="1.0"/>
   <p:tag name="KSO_WM_BEAUTIFY_FLAG" val="#wm#"/>
